--- a/public/fun/pack/pptx/talk/발표템플릿_22_교육·강의_섬마을선착장.pptx
+++ b/public/fun/pack/pptx/talk/발표템플릿_22_교육·강의_섬마을선착장.pptx
@@ -3286,14 +3286,6 @@
 <file path=ppt/slides/slide1.xml><?xml version="1.0" encoding="utf-8"?>
 <p:sld xmlns:a="http://schemas.openxmlformats.org/drawingml/2006/main" xmlns:p="http://schemas.openxmlformats.org/presentationml/2006/main" xmlns:r="http://schemas.openxmlformats.org/officeDocument/2006/relationships">
   <p:cSld>
-    <p:bg>
-      <p:bgPr>
-        <a:solidFill>
-          <a:srgbClr val="EFF5FA"/>
-        </a:solidFill>
-        <a:effectLst/>
-      </p:bgPr>
-    </p:bg>
     <p:spTree>
       <p:nvGrpSpPr>
         <p:cNvPr id="1" name=""/>
@@ -3301,157 +3293,30 @@
         <p:nvPr/>
       </p:nvGrpSpPr>
       <p:grpSpPr/>
-      <p:sp>
-        <p:nvSpPr>
-          <p:cNvPr id="3" name="장식"/>
-          <p:cNvSpPr/>
+      <p:pic>
+        <p:nvPicPr>
+          <p:cNvPr id="3" name="표지 그림" descr="talk-22.jpg"/>
+          <p:cNvPicPr>
+            <a:picLocks noChangeAspect="1"/>
+          </p:cNvPicPr>
           <p:nvPr/>
-        </p:nvSpPr>
-        <p:spPr>
-          <a:xfrm>
-            <a:off x="7315017" y="960120"/>
-            <a:ext cx="3657508" cy="5897880"/>
-          </a:xfrm>
-          <a:prstGeom prst="round2SameRect">
-            <a:avLst>
-              <a:gd name="adj1" fmla="val 50000"/>
-              <a:gd name="adj2" fmla="val 0"/>
-            </a:avLst>
-          </a:prstGeom>
-          <a:solidFill>
-            <a:srgbClr val="CEE2F3"/>
-          </a:solidFill>
-          <a:ln>
-            <a:noFill/>
-          </a:ln>
-        </p:spPr>
-        <p:txBody>
-          <a:bodyPr rtlCol="0" anchor="ctr"/>
-          <a:lstStyle/>
-          <a:p>
-            <a:pPr algn="ctr"/>
-          </a:p>
-        </p:txBody>
-      </p:sp>
-      <p:sp>
-        <p:nvSpPr>
-          <p:cNvPr id="4" name="장식"/>
-          <p:cNvSpPr/>
-          <p:nvPr/>
-        </p:nvSpPr>
-        <p:spPr>
-          <a:xfrm>
-            <a:off x="7924601" y="1783080"/>
-            <a:ext cx="2438339" cy="5074920"/>
-          </a:xfrm>
-          <a:prstGeom prst="round2SameRect">
-            <a:avLst>
-              <a:gd name="adj1" fmla="val 50000"/>
-              <a:gd name="adj2" fmla="val 0"/>
-            </a:avLst>
-          </a:prstGeom>
-          <a:solidFill>
-            <a:srgbClr val="275A86"/>
-          </a:solidFill>
-          <a:ln>
-            <a:noFill/>
-          </a:ln>
-        </p:spPr>
-        <p:txBody>
-          <a:bodyPr rtlCol="0" anchor="ctr"/>
-          <a:lstStyle/>
-          <a:p>
-            <a:pPr algn="ctr"/>
-          </a:p>
-        </p:txBody>
-      </p:sp>
-      <p:sp>
-        <p:nvSpPr>
-          <p:cNvPr id="5" name="장식"/>
-          <p:cNvSpPr/>
-          <p:nvPr/>
-        </p:nvSpPr>
-        <p:spPr>
-          <a:xfrm>
-            <a:off x="8046518" y="3017533"/>
-            <a:ext cx="2194505" cy="548626"/>
-          </a:xfrm>
-          <a:prstGeom prst="wave">
+        </p:nvPicPr>
+        <p:blipFill>
+          <a:blip r:embed="rId2"/>
+          <a:stretch>
+            <a:fillRect/>
+          </a:stretch>
+        </p:blipFill>
+        <p:spPr>
+          <a:xfrm>
+            <a:off x="0" y="0"/>
+            <a:ext cx="12191695" cy="6858000"/>
+          </a:xfrm>
+          <a:prstGeom prst="rect">
             <a:avLst/>
           </a:prstGeom>
-          <a:solidFill>
-            <a:srgbClr val="CEE2F3"/>
-          </a:solidFill>
-          <a:ln>
-            <a:noFill/>
-          </a:ln>
-        </p:spPr>
-        <p:txBody>
-          <a:bodyPr rtlCol="0" anchor="ctr"/>
-          <a:lstStyle/>
-          <a:p>
-            <a:pPr algn="ctr"/>
-          </a:p>
-        </p:txBody>
-      </p:sp>
-      <p:sp>
-        <p:nvSpPr>
-          <p:cNvPr id="6" name="장식"/>
-          <p:cNvSpPr/>
-          <p:nvPr/>
-        </p:nvSpPr>
-        <p:spPr>
-          <a:xfrm>
-            <a:off x="8046518" y="3493009"/>
-            <a:ext cx="2194505" cy="548626"/>
-          </a:xfrm>
-          <a:prstGeom prst="wave">
-            <a:avLst/>
-          </a:prstGeom>
-          <a:solidFill>
-            <a:srgbClr val="FFFFFF"/>
-          </a:solidFill>
-          <a:ln>
-            <a:noFill/>
-          </a:ln>
-        </p:spPr>
-        <p:txBody>
-          <a:bodyPr rtlCol="0" anchor="ctr"/>
-          <a:lstStyle/>
-          <a:p>
-            <a:pPr algn="ctr"/>
-          </a:p>
-        </p:txBody>
-      </p:sp>
-      <p:sp>
-        <p:nvSpPr>
-          <p:cNvPr id="7" name="장식"/>
-          <p:cNvSpPr/>
-          <p:nvPr/>
-        </p:nvSpPr>
-        <p:spPr>
-          <a:xfrm>
-            <a:off x="8046518" y="3968485"/>
-            <a:ext cx="2194505" cy="548626"/>
-          </a:xfrm>
-          <a:prstGeom prst="wave">
-            <a:avLst/>
-          </a:prstGeom>
-          <a:solidFill>
-            <a:srgbClr val="913B3E"/>
-          </a:solidFill>
-          <a:ln>
-            <a:noFill/>
-          </a:ln>
-        </p:spPr>
-        <p:txBody>
-          <a:bodyPr rtlCol="0" anchor="ctr"/>
-          <a:lstStyle/>
-          <a:p>
-            <a:pPr algn="ctr"/>
-          </a:p>
-        </p:txBody>
-      </p:sp>
+        </p:spPr>
+      </p:pic>
       <p:sp>
         <p:nvSpPr>
           <p:cNvPr id="2" name="Title 1"/>
@@ -3492,14 +3357,14 @@
       </p:sp>
       <p:sp>
         <p:nvSpPr>
-          <p:cNvPr id="8" name="한 줄 문구"/>
+          <p:cNvPr id="4" name="한 줄 문구"/>
           <p:cNvSpPr txBox="1"/>
           <p:nvPr/>
         </p:nvSpPr>
         <p:spPr>
           <a:xfrm>
-            <a:off x="853418" y="3703320"/>
-            <a:ext cx="5852013" cy="822960"/>
+            <a:off x="853418" y="3749039"/>
+            <a:ext cx="6095847" cy="822960"/>
           </a:xfrm>
           <a:prstGeom prst="rect">
             <a:avLst/>
@@ -3523,21 +3388,21 @@
                   <a:srgbClr val="122A3F"/>
                 </a:solidFill>
               </a:rPr>
-              <a:t>먼 섬까지 닿는 목소리로</a:t>
-            </a:r>
-          </a:p>
-        </p:txBody>
-      </p:sp>
-      <p:sp>
-        <p:nvSpPr>
-          <p:cNvPr id="9" name="안내 문구"/>
+              <a:t>더운 날이니 중간에 쉬는 시간을 두겠습니다</a:t>
+            </a:r>
+          </a:p>
+        </p:txBody>
+      </p:sp>
+      <p:sp>
+        <p:nvSpPr>
+          <p:cNvPr id="5" name="안내 문구"/>
           <p:cNvSpPr txBox="1"/>
           <p:nvPr/>
         </p:nvSpPr>
         <p:spPr>
           <a:xfrm>
-            <a:off x="853418" y="4572000"/>
-            <a:ext cx="5852013" cy="914400"/>
+            <a:off x="853418" y="4617720"/>
+            <a:ext cx="6095847" cy="914400"/>
           </a:xfrm>
           <a:prstGeom prst="rect">
             <a:avLst/>
@@ -3576,7 +3441,7 @@
                   <a:srgbClr val="666666"/>
                 </a:solidFill>
               </a:rPr>
-              <a:t>2026. 00. 00</a:t>
+              <a:t>2027. 00. 00</a:t>
             </a:r>
           </a:p>
         </p:txBody>
@@ -3641,93 +3506,6 @@
       </p:sp>
       <p:sp>
         <p:nvSpPr>
-          <p:cNvPr id="4" name="장식"/>
-          <p:cNvSpPr/>
-          <p:nvPr/>
-        </p:nvSpPr>
-        <p:spPr>
-          <a:xfrm>
-            <a:off x="10655503" y="557784"/>
-            <a:ext cx="877824" cy="219456"/>
-          </a:xfrm>
-          <a:prstGeom prst="wave">
-            <a:avLst/>
-          </a:prstGeom>
-          <a:solidFill>
-            <a:srgbClr val="CEE2F3"/>
-          </a:solidFill>
-          <a:ln>
-            <a:noFill/>
-          </a:ln>
-        </p:spPr>
-        <p:txBody>
-          <a:bodyPr rtlCol="0" anchor="ctr"/>
-          <a:lstStyle/>
-          <a:p>
-            <a:pPr algn="ctr"/>
-          </a:p>
-        </p:txBody>
-      </p:sp>
-      <p:sp>
-        <p:nvSpPr>
-          <p:cNvPr id="5" name="장식"/>
-          <p:cNvSpPr/>
-          <p:nvPr/>
-        </p:nvSpPr>
-        <p:spPr>
-          <a:xfrm>
-            <a:off x="10655503" y="747979"/>
-            <a:ext cx="877824" cy="219456"/>
-          </a:xfrm>
-          <a:prstGeom prst="wave">
-            <a:avLst/>
-          </a:prstGeom>
-          <a:solidFill>
-            <a:srgbClr val="275A86"/>
-          </a:solidFill>
-          <a:ln>
-            <a:noFill/>
-          </a:ln>
-        </p:spPr>
-        <p:txBody>
-          <a:bodyPr rtlCol="0" anchor="ctr"/>
-          <a:lstStyle/>
-          <a:p>
-            <a:pPr algn="ctr"/>
-          </a:p>
-        </p:txBody>
-      </p:sp>
-      <p:sp>
-        <p:nvSpPr>
-          <p:cNvPr id="6" name="장식"/>
-          <p:cNvSpPr/>
-          <p:nvPr/>
-        </p:nvSpPr>
-        <p:spPr>
-          <a:xfrm>
-            <a:off x="10655503" y="938174"/>
-            <a:ext cx="877824" cy="219456"/>
-          </a:xfrm>
-          <a:prstGeom prst="wave">
-            <a:avLst/>
-          </a:prstGeom>
-          <a:solidFill>
-            <a:srgbClr val="913B3E"/>
-          </a:solidFill>
-          <a:ln>
-            <a:noFill/>
-          </a:ln>
-        </p:spPr>
-        <p:txBody>
-          <a:bodyPr rtlCol="0" anchor="ctr"/>
-          <a:lstStyle/>
-          <a:p>
-            <a:pPr algn="ctr"/>
-          </a:p>
-        </p:txBody>
-      </p:sp>
-      <p:sp>
-        <p:nvSpPr>
           <p:cNvPr id="2" name="Title 1"/>
           <p:cNvSpPr>
             <a:spLocks noGrp="1"/>
@@ -3766,7 +3544,7 @@
       </p:sp>
       <p:sp>
         <p:nvSpPr>
-          <p:cNvPr id="7" name="줄 1"/>
+          <p:cNvPr id="4" name="줄 1"/>
           <p:cNvSpPr/>
           <p:nvPr/>
         </p:nvSpPr>
@@ -3799,7 +3577,7 @@
       </p:sp>
       <p:sp>
         <p:nvSpPr>
-          <p:cNvPr id="8" name="번호 1"/>
+          <p:cNvPr id="5" name="번호 1"/>
           <p:cNvSpPr/>
           <p:nvPr/>
         </p:nvSpPr>
@@ -3842,7 +3620,7 @@
       </p:sp>
       <p:sp>
         <p:nvSpPr>
-          <p:cNvPr id="9" name="TextBox 8"/>
+          <p:cNvPr id="6" name="TextBox 5"/>
           <p:cNvSpPr txBox="1"/>
           <p:nvPr/>
         </p:nvSpPr>
@@ -3880,7 +3658,7 @@
       </p:sp>
       <p:sp>
         <p:nvSpPr>
-          <p:cNvPr id="10" name="TextBox 9"/>
+          <p:cNvPr id="7" name="TextBox 6"/>
           <p:cNvSpPr txBox="1"/>
           <p:nvPr/>
         </p:nvSpPr>
@@ -3918,7 +3696,7 @@
       </p:sp>
       <p:sp>
         <p:nvSpPr>
-          <p:cNvPr id="11" name="줄 2"/>
+          <p:cNvPr id="8" name="줄 2"/>
           <p:cNvSpPr/>
           <p:nvPr/>
         </p:nvSpPr>
@@ -3951,7 +3729,7 @@
       </p:sp>
       <p:sp>
         <p:nvSpPr>
-          <p:cNvPr id="12" name="번호 2"/>
+          <p:cNvPr id="9" name="번호 2"/>
           <p:cNvSpPr/>
           <p:nvPr/>
         </p:nvSpPr>
@@ -3994,7 +3772,7 @@
       </p:sp>
       <p:sp>
         <p:nvSpPr>
-          <p:cNvPr id="13" name="TextBox 12"/>
+          <p:cNvPr id="10" name="TextBox 9"/>
           <p:cNvSpPr txBox="1"/>
           <p:nvPr/>
         </p:nvSpPr>
@@ -4032,7 +3810,7 @@
       </p:sp>
       <p:sp>
         <p:nvSpPr>
-          <p:cNvPr id="14" name="TextBox 13"/>
+          <p:cNvPr id="11" name="TextBox 10"/>
           <p:cNvSpPr txBox="1"/>
           <p:nvPr/>
         </p:nvSpPr>
@@ -4070,7 +3848,7 @@
       </p:sp>
       <p:sp>
         <p:nvSpPr>
-          <p:cNvPr id="15" name="줄 3"/>
+          <p:cNvPr id="12" name="줄 3"/>
           <p:cNvSpPr/>
           <p:nvPr/>
         </p:nvSpPr>
@@ -4103,7 +3881,7 @@
       </p:sp>
       <p:sp>
         <p:nvSpPr>
-          <p:cNvPr id="16" name="번호 3"/>
+          <p:cNvPr id="13" name="번호 3"/>
           <p:cNvSpPr/>
           <p:nvPr/>
         </p:nvSpPr>
@@ -4146,7 +3924,7 @@
       </p:sp>
       <p:sp>
         <p:nvSpPr>
-          <p:cNvPr id="17" name="TextBox 16"/>
+          <p:cNvPr id="14" name="TextBox 13"/>
           <p:cNvSpPr txBox="1"/>
           <p:nvPr/>
         </p:nvSpPr>
@@ -4184,7 +3962,7 @@
       </p:sp>
       <p:sp>
         <p:nvSpPr>
-          <p:cNvPr id="18" name="TextBox 17"/>
+          <p:cNvPr id="15" name="TextBox 14"/>
           <p:cNvSpPr txBox="1"/>
           <p:nvPr/>
         </p:nvSpPr>
@@ -4222,7 +4000,7 @@
       </p:sp>
       <p:sp>
         <p:nvSpPr>
-          <p:cNvPr id="19" name="줄 4"/>
+          <p:cNvPr id="16" name="줄 4"/>
           <p:cNvSpPr/>
           <p:nvPr/>
         </p:nvSpPr>
@@ -4255,7 +4033,7 @@
       </p:sp>
       <p:sp>
         <p:nvSpPr>
-          <p:cNvPr id="20" name="번호 4"/>
+          <p:cNvPr id="17" name="번호 4"/>
           <p:cNvSpPr/>
           <p:nvPr/>
         </p:nvSpPr>
@@ -4298,7 +4076,7 @@
       </p:sp>
       <p:sp>
         <p:nvSpPr>
-          <p:cNvPr id="21" name="TextBox 20"/>
+          <p:cNvPr id="18" name="TextBox 17"/>
           <p:cNvSpPr txBox="1"/>
           <p:nvPr/>
         </p:nvSpPr>
@@ -4336,7 +4114,7 @@
       </p:sp>
       <p:sp>
         <p:nvSpPr>
-          <p:cNvPr id="22" name="TextBox 21"/>
+          <p:cNvPr id="19" name="TextBox 18"/>
           <p:cNvSpPr txBox="1"/>
           <p:nvPr/>
         </p:nvSpPr>
@@ -4432,93 +4210,6 @@
       </p:sp>
       <p:sp>
         <p:nvSpPr>
-          <p:cNvPr id="4" name="장식"/>
-          <p:cNvSpPr/>
-          <p:nvPr/>
-        </p:nvSpPr>
-        <p:spPr>
-          <a:xfrm>
-            <a:off x="10655503" y="557784"/>
-            <a:ext cx="877824" cy="219456"/>
-          </a:xfrm>
-          <a:prstGeom prst="wave">
-            <a:avLst/>
-          </a:prstGeom>
-          <a:solidFill>
-            <a:srgbClr val="CEE2F3"/>
-          </a:solidFill>
-          <a:ln>
-            <a:noFill/>
-          </a:ln>
-        </p:spPr>
-        <p:txBody>
-          <a:bodyPr rtlCol="0" anchor="ctr"/>
-          <a:lstStyle/>
-          <a:p>
-            <a:pPr algn="ctr"/>
-          </a:p>
-        </p:txBody>
-      </p:sp>
-      <p:sp>
-        <p:nvSpPr>
-          <p:cNvPr id="5" name="장식"/>
-          <p:cNvSpPr/>
-          <p:nvPr/>
-        </p:nvSpPr>
-        <p:spPr>
-          <a:xfrm>
-            <a:off x="10655503" y="747979"/>
-            <a:ext cx="877824" cy="219456"/>
-          </a:xfrm>
-          <a:prstGeom prst="wave">
-            <a:avLst/>
-          </a:prstGeom>
-          <a:solidFill>
-            <a:srgbClr val="275A86"/>
-          </a:solidFill>
-          <a:ln>
-            <a:noFill/>
-          </a:ln>
-        </p:spPr>
-        <p:txBody>
-          <a:bodyPr rtlCol="0" anchor="ctr"/>
-          <a:lstStyle/>
-          <a:p>
-            <a:pPr algn="ctr"/>
-          </a:p>
-        </p:txBody>
-      </p:sp>
-      <p:sp>
-        <p:nvSpPr>
-          <p:cNvPr id="6" name="장식"/>
-          <p:cNvSpPr/>
-          <p:nvPr/>
-        </p:nvSpPr>
-        <p:spPr>
-          <a:xfrm>
-            <a:off x="10655503" y="938174"/>
-            <a:ext cx="877824" cy="219456"/>
-          </a:xfrm>
-          <a:prstGeom prst="wave">
-            <a:avLst/>
-          </a:prstGeom>
-          <a:solidFill>
-            <a:srgbClr val="913B3E"/>
-          </a:solidFill>
-          <a:ln>
-            <a:noFill/>
-          </a:ln>
-        </p:spPr>
-        <p:txBody>
-          <a:bodyPr rtlCol="0" anchor="ctr"/>
-          <a:lstStyle/>
-          <a:p>
-            <a:pPr algn="ctr"/>
-          </a:p>
-        </p:txBody>
-      </p:sp>
-      <p:sp>
-        <p:nvSpPr>
           <p:cNvPr id="2" name="Title 1"/>
           <p:cNvSpPr>
             <a:spLocks noGrp="1"/>
@@ -4557,7 +4248,7 @@
       </p:sp>
       <p:sp>
         <p:nvSpPr>
-          <p:cNvPr id="7" name="핵심 문장"/>
+          <p:cNvPr id="4" name="핵심 문장"/>
           <p:cNvSpPr txBox="1"/>
           <p:nvPr/>
         </p:nvSpPr>
@@ -4595,7 +4286,7 @@
       </p:sp>
       <p:sp>
         <p:nvSpPr>
-          <p:cNvPr id="8" name="카드 1"/>
+          <p:cNvPr id="5" name="카드 1"/>
           <p:cNvSpPr/>
           <p:nvPr/>
         </p:nvSpPr>
@@ -4628,7 +4319,7 @@
       </p:sp>
       <p:sp>
         <p:nvSpPr>
-          <p:cNvPr id="9" name="번호 1"/>
+          <p:cNvPr id="6" name="번호 1"/>
           <p:cNvSpPr/>
           <p:nvPr/>
         </p:nvSpPr>
@@ -4671,7 +4362,7 @@
       </p:sp>
       <p:sp>
         <p:nvSpPr>
-          <p:cNvPr id="10" name="TextBox 9"/>
+          <p:cNvPr id="7" name="TextBox 6"/>
           <p:cNvSpPr txBox="1"/>
           <p:nvPr/>
         </p:nvSpPr>
@@ -4709,7 +4400,7 @@
       </p:sp>
       <p:sp>
         <p:nvSpPr>
-          <p:cNvPr id="11" name="TextBox 10"/>
+          <p:cNvPr id="8" name="TextBox 7"/>
           <p:cNvSpPr txBox="1"/>
           <p:nvPr/>
         </p:nvSpPr>
@@ -4762,7 +4453,7 @@
       </p:sp>
       <p:sp>
         <p:nvSpPr>
-          <p:cNvPr id="12" name="카드 2"/>
+          <p:cNvPr id="9" name="카드 2"/>
           <p:cNvSpPr/>
           <p:nvPr/>
         </p:nvSpPr>
@@ -4795,7 +4486,7 @@
       </p:sp>
       <p:sp>
         <p:nvSpPr>
-          <p:cNvPr id="13" name="번호 2"/>
+          <p:cNvPr id="10" name="번호 2"/>
           <p:cNvSpPr/>
           <p:nvPr/>
         </p:nvSpPr>
@@ -4838,7 +4529,7 @@
       </p:sp>
       <p:sp>
         <p:nvSpPr>
-          <p:cNvPr id="14" name="TextBox 13"/>
+          <p:cNvPr id="11" name="TextBox 10"/>
           <p:cNvSpPr txBox="1"/>
           <p:nvPr/>
         </p:nvSpPr>
@@ -4876,7 +4567,7 @@
       </p:sp>
       <p:sp>
         <p:nvSpPr>
-          <p:cNvPr id="15" name="TextBox 14"/>
+          <p:cNvPr id="12" name="TextBox 11"/>
           <p:cNvSpPr txBox="1"/>
           <p:nvPr/>
         </p:nvSpPr>
@@ -4929,7 +4620,7 @@
       </p:sp>
       <p:sp>
         <p:nvSpPr>
-          <p:cNvPr id="16" name="카드 3"/>
+          <p:cNvPr id="13" name="카드 3"/>
           <p:cNvSpPr/>
           <p:nvPr/>
         </p:nvSpPr>
@@ -4962,7 +4653,7 @@
       </p:sp>
       <p:sp>
         <p:nvSpPr>
-          <p:cNvPr id="17" name="번호 3"/>
+          <p:cNvPr id="14" name="번호 3"/>
           <p:cNvSpPr/>
           <p:nvPr/>
         </p:nvSpPr>
@@ -5005,7 +4696,7 @@
       </p:sp>
       <p:sp>
         <p:nvSpPr>
-          <p:cNvPr id="18" name="TextBox 17"/>
+          <p:cNvPr id="15" name="TextBox 14"/>
           <p:cNvSpPr txBox="1"/>
           <p:nvPr/>
         </p:nvSpPr>
@@ -5043,7 +4734,7 @@
       </p:sp>
       <p:sp>
         <p:nvSpPr>
-          <p:cNvPr id="19" name="TextBox 18"/>
+          <p:cNvPr id="16" name="TextBox 15"/>
           <p:cNvSpPr txBox="1"/>
           <p:nvPr/>
         </p:nvSpPr>
@@ -5154,93 +4845,6 @@
       </p:sp>
       <p:sp>
         <p:nvSpPr>
-          <p:cNvPr id="4" name="장식"/>
-          <p:cNvSpPr/>
-          <p:nvPr/>
-        </p:nvSpPr>
-        <p:spPr>
-          <a:xfrm>
-            <a:off x="10655503" y="557784"/>
-            <a:ext cx="877824" cy="219456"/>
-          </a:xfrm>
-          <a:prstGeom prst="wave">
-            <a:avLst/>
-          </a:prstGeom>
-          <a:solidFill>
-            <a:srgbClr val="CEE2F3"/>
-          </a:solidFill>
-          <a:ln>
-            <a:noFill/>
-          </a:ln>
-        </p:spPr>
-        <p:txBody>
-          <a:bodyPr rtlCol="0" anchor="ctr"/>
-          <a:lstStyle/>
-          <a:p>
-            <a:pPr algn="ctr"/>
-          </a:p>
-        </p:txBody>
-      </p:sp>
-      <p:sp>
-        <p:nvSpPr>
-          <p:cNvPr id="5" name="장식"/>
-          <p:cNvSpPr/>
-          <p:nvPr/>
-        </p:nvSpPr>
-        <p:spPr>
-          <a:xfrm>
-            <a:off x="10655503" y="747979"/>
-            <a:ext cx="877824" cy="219456"/>
-          </a:xfrm>
-          <a:prstGeom prst="wave">
-            <a:avLst/>
-          </a:prstGeom>
-          <a:solidFill>
-            <a:srgbClr val="275A86"/>
-          </a:solidFill>
-          <a:ln>
-            <a:noFill/>
-          </a:ln>
-        </p:spPr>
-        <p:txBody>
-          <a:bodyPr rtlCol="0" anchor="ctr"/>
-          <a:lstStyle/>
-          <a:p>
-            <a:pPr algn="ctr"/>
-          </a:p>
-        </p:txBody>
-      </p:sp>
-      <p:sp>
-        <p:nvSpPr>
-          <p:cNvPr id="6" name="장식"/>
-          <p:cNvSpPr/>
-          <p:nvPr/>
-        </p:nvSpPr>
-        <p:spPr>
-          <a:xfrm>
-            <a:off x="10655503" y="938174"/>
-            <a:ext cx="877824" cy="219456"/>
-          </a:xfrm>
-          <a:prstGeom prst="wave">
-            <a:avLst/>
-          </a:prstGeom>
-          <a:solidFill>
-            <a:srgbClr val="913B3E"/>
-          </a:solidFill>
-          <a:ln>
-            <a:noFill/>
-          </a:ln>
-        </p:spPr>
-        <p:txBody>
-          <a:bodyPr rtlCol="0" anchor="ctr"/>
-          <a:lstStyle/>
-          <a:p>
-            <a:pPr algn="ctr"/>
-          </a:p>
-        </p:txBody>
-      </p:sp>
-      <p:sp>
-        <p:nvSpPr>
           <p:cNvPr id="2" name="Title 1"/>
           <p:cNvSpPr>
             <a:spLocks noGrp="1"/>
@@ -5279,7 +4883,7 @@
       </p:sp>
       <p:sp>
         <p:nvSpPr>
-          <p:cNvPr id="7" name="왼쪽 칸"/>
+          <p:cNvPr id="4" name="왼쪽 칸"/>
           <p:cNvSpPr/>
           <p:nvPr/>
         </p:nvSpPr>
@@ -5312,7 +4916,7 @@
       </p:sp>
       <p:sp>
         <p:nvSpPr>
-          <p:cNvPr id="8" name="칸 제목 바"/>
+          <p:cNvPr id="5" name="칸 제목 바"/>
           <p:cNvSpPr/>
           <p:nvPr/>
         </p:nvSpPr>
@@ -5343,7 +4947,7 @@
       </p:sp>
       <p:sp>
         <p:nvSpPr>
-          <p:cNvPr id="9" name="TextBox 8"/>
+          <p:cNvPr id="6" name="TextBox 5"/>
           <p:cNvSpPr txBox="1"/>
           <p:nvPr/>
         </p:nvSpPr>
@@ -5381,7 +4985,7 @@
       </p:sp>
       <p:sp>
         <p:nvSpPr>
-          <p:cNvPr id="10" name="TextBox 9"/>
+          <p:cNvPr id="7" name="TextBox 6"/>
           <p:cNvSpPr txBox="1"/>
           <p:nvPr/>
         </p:nvSpPr>
@@ -5464,7 +5068,7 @@
       </p:sp>
       <p:sp>
         <p:nvSpPr>
-          <p:cNvPr id="11" name="오른쪽 칸"/>
+          <p:cNvPr id="8" name="오른쪽 칸"/>
           <p:cNvSpPr/>
           <p:nvPr/>
         </p:nvSpPr>
@@ -5497,7 +5101,7 @@
       </p:sp>
       <p:sp>
         <p:nvSpPr>
-          <p:cNvPr id="12" name="칸 제목 바"/>
+          <p:cNvPr id="9" name="칸 제목 바"/>
           <p:cNvSpPr/>
           <p:nvPr/>
         </p:nvSpPr>
@@ -5528,7 +5132,7 @@
       </p:sp>
       <p:sp>
         <p:nvSpPr>
-          <p:cNvPr id="13" name="TextBox 12"/>
+          <p:cNvPr id="10" name="TextBox 9"/>
           <p:cNvSpPr txBox="1"/>
           <p:nvPr/>
         </p:nvSpPr>
@@ -5566,7 +5170,7 @@
       </p:sp>
       <p:sp>
         <p:nvSpPr>
-          <p:cNvPr id="14" name="TextBox 13"/>
+          <p:cNvPr id="11" name="TextBox 10"/>
           <p:cNvSpPr txBox="1"/>
           <p:nvPr/>
         </p:nvSpPr>
@@ -5707,93 +5311,6 @@
       </p:sp>
       <p:sp>
         <p:nvSpPr>
-          <p:cNvPr id="4" name="장식"/>
-          <p:cNvSpPr/>
-          <p:nvPr/>
-        </p:nvSpPr>
-        <p:spPr>
-          <a:xfrm>
-            <a:off x="10655503" y="557784"/>
-            <a:ext cx="877824" cy="219456"/>
-          </a:xfrm>
-          <a:prstGeom prst="wave">
-            <a:avLst/>
-          </a:prstGeom>
-          <a:solidFill>
-            <a:srgbClr val="CEE2F3"/>
-          </a:solidFill>
-          <a:ln>
-            <a:noFill/>
-          </a:ln>
-        </p:spPr>
-        <p:txBody>
-          <a:bodyPr rtlCol="0" anchor="ctr"/>
-          <a:lstStyle/>
-          <a:p>
-            <a:pPr algn="ctr"/>
-          </a:p>
-        </p:txBody>
-      </p:sp>
-      <p:sp>
-        <p:nvSpPr>
-          <p:cNvPr id="5" name="장식"/>
-          <p:cNvSpPr/>
-          <p:nvPr/>
-        </p:nvSpPr>
-        <p:spPr>
-          <a:xfrm>
-            <a:off x="10655503" y="747979"/>
-            <a:ext cx="877824" cy="219456"/>
-          </a:xfrm>
-          <a:prstGeom prst="wave">
-            <a:avLst/>
-          </a:prstGeom>
-          <a:solidFill>
-            <a:srgbClr val="275A86"/>
-          </a:solidFill>
-          <a:ln>
-            <a:noFill/>
-          </a:ln>
-        </p:spPr>
-        <p:txBody>
-          <a:bodyPr rtlCol="0" anchor="ctr"/>
-          <a:lstStyle/>
-          <a:p>
-            <a:pPr algn="ctr"/>
-          </a:p>
-        </p:txBody>
-      </p:sp>
-      <p:sp>
-        <p:nvSpPr>
-          <p:cNvPr id="6" name="장식"/>
-          <p:cNvSpPr/>
-          <p:nvPr/>
-        </p:nvSpPr>
-        <p:spPr>
-          <a:xfrm>
-            <a:off x="10655503" y="938174"/>
-            <a:ext cx="877824" cy="219456"/>
-          </a:xfrm>
-          <a:prstGeom prst="wave">
-            <a:avLst/>
-          </a:prstGeom>
-          <a:solidFill>
-            <a:srgbClr val="913B3E"/>
-          </a:solidFill>
-          <a:ln>
-            <a:noFill/>
-          </a:ln>
-        </p:spPr>
-        <p:txBody>
-          <a:bodyPr rtlCol="0" anchor="ctr"/>
-          <a:lstStyle/>
-          <a:p>
-            <a:pPr algn="ctr"/>
-          </a:p>
-        </p:txBody>
-      </p:sp>
-      <p:sp>
-        <p:nvSpPr>
           <p:cNvPr id="2" name="Title 1"/>
           <p:cNvSpPr>
             <a:spLocks noGrp="1"/>
@@ -5832,7 +5349,7 @@
       </p:sp>
       <p:graphicFrame>
         <p:nvGraphicFramePr>
-          <p:cNvPr id="7" name="표"/>
+          <p:cNvPr id="4" name="표"/>
           <p:cNvGraphicFramePr>
             <a:graphicFrameLocks noGrp="1"/>
           </p:cNvGraphicFramePr>
@@ -6985,14 +6502,6 @@
 <file path=ppt/slides/slide6.xml><?xml version="1.0" encoding="utf-8"?>
 <p:sld xmlns:a="http://schemas.openxmlformats.org/drawingml/2006/main" xmlns:p="http://schemas.openxmlformats.org/presentationml/2006/main" xmlns:r="http://schemas.openxmlformats.org/officeDocument/2006/relationships">
   <p:cSld>
-    <p:bg>
-      <p:bgPr>
-        <a:solidFill>
-          <a:srgbClr val="EFF5FA"/>
-        </a:solidFill>
-        <a:effectLst/>
-      </p:bgPr>
-    </p:bg>
     <p:spTree>
       <p:nvGrpSpPr>
         <p:cNvPr id="1" name=""/>
@@ -7000,157 +6509,30 @@
         <p:nvPr/>
       </p:nvGrpSpPr>
       <p:grpSpPr/>
-      <p:sp>
-        <p:nvSpPr>
-          <p:cNvPr id="3" name="장식"/>
-          <p:cNvSpPr/>
+      <p:pic>
+        <p:nvPicPr>
+          <p:cNvPr id="3" name="표지 그림" descr="talk-22.jpg"/>
+          <p:cNvPicPr>
+            <a:picLocks noChangeAspect="1"/>
+          </p:cNvPicPr>
           <p:nvPr/>
-        </p:nvSpPr>
-        <p:spPr>
-          <a:xfrm>
-            <a:off x="7315017" y="960120"/>
-            <a:ext cx="3657508" cy="5897880"/>
-          </a:xfrm>
-          <a:prstGeom prst="round2SameRect">
-            <a:avLst>
-              <a:gd name="adj1" fmla="val 50000"/>
-              <a:gd name="adj2" fmla="val 0"/>
-            </a:avLst>
-          </a:prstGeom>
-          <a:solidFill>
-            <a:srgbClr val="CEE2F3"/>
-          </a:solidFill>
-          <a:ln>
-            <a:noFill/>
-          </a:ln>
-        </p:spPr>
-        <p:txBody>
-          <a:bodyPr rtlCol="0" anchor="ctr"/>
-          <a:lstStyle/>
-          <a:p>
-            <a:pPr algn="ctr"/>
-          </a:p>
-        </p:txBody>
-      </p:sp>
-      <p:sp>
-        <p:nvSpPr>
-          <p:cNvPr id="4" name="장식"/>
-          <p:cNvSpPr/>
-          <p:nvPr/>
-        </p:nvSpPr>
-        <p:spPr>
-          <a:xfrm>
-            <a:off x="7924601" y="1783080"/>
-            <a:ext cx="2438339" cy="5074920"/>
-          </a:xfrm>
-          <a:prstGeom prst="round2SameRect">
-            <a:avLst>
-              <a:gd name="adj1" fmla="val 50000"/>
-              <a:gd name="adj2" fmla="val 0"/>
-            </a:avLst>
-          </a:prstGeom>
-          <a:solidFill>
-            <a:srgbClr val="275A86"/>
-          </a:solidFill>
-          <a:ln>
-            <a:noFill/>
-          </a:ln>
-        </p:spPr>
-        <p:txBody>
-          <a:bodyPr rtlCol="0" anchor="ctr"/>
-          <a:lstStyle/>
-          <a:p>
-            <a:pPr algn="ctr"/>
-          </a:p>
-        </p:txBody>
-      </p:sp>
-      <p:sp>
-        <p:nvSpPr>
-          <p:cNvPr id="5" name="장식"/>
-          <p:cNvSpPr/>
-          <p:nvPr/>
-        </p:nvSpPr>
-        <p:spPr>
-          <a:xfrm>
-            <a:off x="8046518" y="3017533"/>
-            <a:ext cx="2194505" cy="548626"/>
-          </a:xfrm>
-          <a:prstGeom prst="wave">
+        </p:nvPicPr>
+        <p:blipFill>
+          <a:blip r:embed="rId2"/>
+          <a:stretch>
+            <a:fillRect/>
+          </a:stretch>
+        </p:blipFill>
+        <p:spPr>
+          <a:xfrm>
+            <a:off x="0" y="0"/>
+            <a:ext cx="12191695" cy="6858000"/>
+          </a:xfrm>
+          <a:prstGeom prst="rect">
             <a:avLst/>
           </a:prstGeom>
-          <a:solidFill>
-            <a:srgbClr val="CEE2F3"/>
-          </a:solidFill>
-          <a:ln>
-            <a:noFill/>
-          </a:ln>
-        </p:spPr>
-        <p:txBody>
-          <a:bodyPr rtlCol="0" anchor="ctr"/>
-          <a:lstStyle/>
-          <a:p>
-            <a:pPr algn="ctr"/>
-          </a:p>
-        </p:txBody>
-      </p:sp>
-      <p:sp>
-        <p:nvSpPr>
-          <p:cNvPr id="6" name="장식"/>
-          <p:cNvSpPr/>
-          <p:nvPr/>
-        </p:nvSpPr>
-        <p:spPr>
-          <a:xfrm>
-            <a:off x="8046518" y="3493009"/>
-            <a:ext cx="2194505" cy="548626"/>
-          </a:xfrm>
-          <a:prstGeom prst="wave">
-            <a:avLst/>
-          </a:prstGeom>
-          <a:solidFill>
-            <a:srgbClr val="FFFFFF"/>
-          </a:solidFill>
-          <a:ln>
-            <a:noFill/>
-          </a:ln>
-        </p:spPr>
-        <p:txBody>
-          <a:bodyPr rtlCol="0" anchor="ctr"/>
-          <a:lstStyle/>
-          <a:p>
-            <a:pPr algn="ctr"/>
-          </a:p>
-        </p:txBody>
-      </p:sp>
-      <p:sp>
-        <p:nvSpPr>
-          <p:cNvPr id="7" name="장식"/>
-          <p:cNvSpPr/>
-          <p:nvPr/>
-        </p:nvSpPr>
-        <p:spPr>
-          <a:xfrm>
-            <a:off x="8046518" y="3968485"/>
-            <a:ext cx="2194505" cy="548626"/>
-          </a:xfrm>
-          <a:prstGeom prst="wave">
-            <a:avLst/>
-          </a:prstGeom>
-          <a:solidFill>
-            <a:srgbClr val="913B3E"/>
-          </a:solidFill>
-          <a:ln>
-            <a:noFill/>
-          </a:ln>
-        </p:spPr>
-        <p:txBody>
-          <a:bodyPr rtlCol="0" anchor="ctr"/>
-          <a:lstStyle/>
-          <a:p>
-            <a:pPr algn="ctr"/>
-          </a:p>
-        </p:txBody>
-      </p:sp>
+        </p:spPr>
+      </p:pic>
       <p:sp>
         <p:nvSpPr>
           <p:cNvPr id="2" name="Title 1"/>
@@ -7191,14 +6573,14 @@
       </p:sp>
       <p:sp>
         <p:nvSpPr>
-          <p:cNvPr id="8" name="한 줄 문구"/>
+          <p:cNvPr id="4" name="한 줄 문구"/>
           <p:cNvSpPr txBox="1"/>
           <p:nvPr/>
         </p:nvSpPr>
         <p:spPr>
           <a:xfrm>
-            <a:off x="853418" y="3703320"/>
-            <a:ext cx="5852013" cy="822960"/>
+            <a:off x="853418" y="3749039"/>
+            <a:ext cx="6095847" cy="822960"/>
           </a:xfrm>
           <a:prstGeom prst="rect">
             <a:avLst/>
@@ -7222,21 +6604,21 @@
                   <a:srgbClr val="122A3F"/>
                 </a:solidFill>
               </a:rPr>
-              <a:t>들어 주셔서 고맙습니다</a:t>
-            </a:r>
-          </a:p>
-        </p:txBody>
-      </p:sp>
-      <p:sp>
-        <p:nvSpPr>
-          <p:cNvPr id="9" name="안내 문구"/>
+              <a:t>끝까지 들어 주셔서 고맙습니다</a:t>
+            </a:r>
+          </a:p>
+        </p:txBody>
+      </p:sp>
+      <p:sp>
+        <p:nvSpPr>
+          <p:cNvPr id="5" name="안내 문구"/>
           <p:cNvSpPr txBox="1"/>
           <p:nvPr/>
         </p:nvSpPr>
         <p:spPr>
           <a:xfrm>
-            <a:off x="853418" y="4572000"/>
-            <a:ext cx="5852013" cy="914400"/>
+            <a:off x="853418" y="4617720"/>
+            <a:ext cx="6095847" cy="914400"/>
           </a:xfrm>
           <a:prstGeom prst="rect">
             <a:avLst/>

--- a/public/fun/pack/pptx/talk/발표템플릿_22_교육·강의_섬마을선착장.pptx
+++ b/public/fun/pack/pptx/talk/발표템플릿_22_교육·강의_섬마을선착장.pptx
@@ -3347,7 +3347,7 @@
             <a:r>
               <a:rPr sz="3600" b="1" i="0">
                 <a:solidFill>
-                  <a:srgbClr val="122A3F"/>
+                  <a:srgbClr val="113B5F"/>
                 </a:solidFill>
               </a:rPr>
               <a:t>발표 제목을 입력하세요</a:t>
@@ -3385,7 +3385,7 @@
             <a:r>
               <a:rPr sz="1700" b="0" i="1">
                 <a:solidFill>
-                  <a:srgbClr val="122A3F"/>
+                  <a:srgbClr val="113B5F"/>
                 </a:solidFill>
               </a:rPr>
               <a:t>더운 날이니 중간에 쉬는 시간을 두겠습니다</a:t>
@@ -3460,7 +3460,7 @@
     <p:bg>
       <p:bgPr>
         <a:solidFill>
-          <a:srgbClr val="EFF5FA"/>
+          <a:srgbClr val="EEF5FC"/>
         </a:solidFill>
         <a:effectLst/>
       </p:bgPr>
@@ -3490,7 +3490,7 @@
             </a:avLst>
           </a:prstGeom>
           <a:solidFill>
-            <a:srgbClr val="CEE2F3"/>
+            <a:srgbClr val="D1E7FA"/>
           </a:solidFill>
           <a:ln>
             <a:noFill/>
@@ -3534,7 +3534,7 @@
             <a:r>
               <a:rPr sz="3000" b="1" i="0">
                 <a:solidFill>
-                  <a:srgbClr val="122A3F"/>
+                  <a:srgbClr val="113B5F"/>
                 </a:solidFill>
               </a:rPr>
               <a:t>목차</a:t>
@@ -3559,11 +3559,11 @@
             </a:avLst>
           </a:prstGeom>
           <a:solidFill>
-            <a:srgbClr val="EFF5FA"/>
+            <a:srgbClr val="EEF5FC"/>
           </a:solidFill>
           <a:ln w="12700">
             <a:solidFill>
-              <a:srgbClr val="CEE2F3"/>
+              <a:srgbClr val="D1E7FA"/>
             </a:solidFill>
           </a:ln>
         </p:spPr>
@@ -3590,7 +3590,7 @@
             <a:avLst/>
           </a:prstGeom>
           <a:solidFill>
-            <a:srgbClr val="275A86"/>
+            <a:srgbClr val="267BC5"/>
           </a:solidFill>
           <a:ln>
             <a:noFill/>
@@ -3648,7 +3648,7 @@
             <a:r>
               <a:rPr sz="1800" b="1" i="0">
                 <a:solidFill>
-                  <a:srgbClr val="122A3F"/>
+                  <a:srgbClr val="113B5F"/>
                 </a:solidFill>
               </a:rPr>
               <a:t>오늘의 목표</a:t>
@@ -3711,11 +3711,11 @@
             </a:avLst>
           </a:prstGeom>
           <a:solidFill>
-            <a:srgbClr val="EFF5FA"/>
+            <a:srgbClr val="EEF5FC"/>
           </a:solidFill>
           <a:ln w="12700">
             <a:solidFill>
-              <a:srgbClr val="CEE2F3"/>
+              <a:srgbClr val="D1E7FA"/>
             </a:solidFill>
           </a:ln>
         </p:spPr>
@@ -3742,7 +3742,7 @@
             <a:avLst/>
           </a:prstGeom>
           <a:solidFill>
-            <a:srgbClr val="275A86"/>
+            <a:srgbClr val="267BC5"/>
           </a:solidFill>
           <a:ln>
             <a:noFill/>
@@ -3800,7 +3800,7 @@
             <a:r>
               <a:rPr sz="1800" b="1" i="0">
                 <a:solidFill>
-                  <a:srgbClr val="122A3F"/>
+                  <a:srgbClr val="113B5F"/>
                 </a:solidFill>
               </a:rPr>
               <a:t>핵심 개념</a:t>
@@ -3863,11 +3863,11 @@
             </a:avLst>
           </a:prstGeom>
           <a:solidFill>
-            <a:srgbClr val="EFF5FA"/>
+            <a:srgbClr val="EEF5FC"/>
           </a:solidFill>
           <a:ln w="12700">
             <a:solidFill>
-              <a:srgbClr val="CEE2F3"/>
+              <a:srgbClr val="D1E7FA"/>
             </a:solidFill>
           </a:ln>
         </p:spPr>
@@ -3894,7 +3894,7 @@
             <a:avLst/>
           </a:prstGeom>
           <a:solidFill>
-            <a:srgbClr val="275A86"/>
+            <a:srgbClr val="267BC5"/>
           </a:solidFill>
           <a:ln>
             <a:noFill/>
@@ -3952,7 +3952,7 @@
             <a:r>
               <a:rPr sz="1800" b="1" i="0">
                 <a:solidFill>
-                  <a:srgbClr val="122A3F"/>
+                  <a:srgbClr val="113B5F"/>
                 </a:solidFill>
               </a:rPr>
               <a:t>실습과 예시</a:t>
@@ -4015,11 +4015,11 @@
             </a:avLst>
           </a:prstGeom>
           <a:solidFill>
-            <a:srgbClr val="EFF5FA"/>
+            <a:srgbClr val="EEF5FC"/>
           </a:solidFill>
           <a:ln w="12700">
             <a:solidFill>
-              <a:srgbClr val="CEE2F3"/>
+              <a:srgbClr val="D1E7FA"/>
             </a:solidFill>
           </a:ln>
         </p:spPr>
@@ -4046,7 +4046,7 @@
             <a:avLst/>
           </a:prstGeom>
           <a:solidFill>
-            <a:srgbClr val="275A86"/>
+            <a:srgbClr val="267BC5"/>
           </a:solidFill>
           <a:ln>
             <a:noFill/>
@@ -4104,7 +4104,7 @@
             <a:r>
               <a:rPr sz="1800" b="1" i="0">
                 <a:solidFill>
-                  <a:srgbClr val="122A3F"/>
+                  <a:srgbClr val="113B5F"/>
                 </a:solidFill>
               </a:rPr>
               <a:t>정리와 질문</a:t>
@@ -4164,7 +4164,7 @@
     <p:bg>
       <p:bgPr>
         <a:solidFill>
-          <a:srgbClr val="EFF5FA"/>
+          <a:srgbClr val="EEF5FC"/>
         </a:solidFill>
         <a:effectLst/>
       </p:bgPr>
@@ -4194,7 +4194,7 @@
             </a:avLst>
           </a:prstGeom>
           <a:solidFill>
-            <a:srgbClr val="CEE2F3"/>
+            <a:srgbClr val="D1E7FA"/>
           </a:solidFill>
           <a:ln>
             <a:noFill/>
@@ -4238,7 +4238,7 @@
             <a:r>
               <a:rPr sz="3000" b="1" i="0">
                 <a:solidFill>
-                  <a:srgbClr val="122A3F"/>
+                  <a:srgbClr val="113B5F"/>
                 </a:solidFill>
               </a:rPr>
               <a:t>핵심 메시지</a:t>
@@ -4276,7 +4276,7 @@
             <a:r>
               <a:rPr sz="2600" b="1" i="0">
                 <a:solidFill>
-                  <a:srgbClr val="122A3F"/>
+                  <a:srgbClr val="113B5F"/>
                 </a:solidFill>
               </a:rPr>
               <a:t>한 문장으로 말하면 — 여기에 핵심 메시지를 입력하세요</a:t>
@@ -4301,11 +4301,11 @@
             </a:avLst>
           </a:prstGeom>
           <a:solidFill>
-            <a:srgbClr val="EFF5FA"/>
+            <a:srgbClr val="EEF5FC"/>
           </a:solidFill>
           <a:ln w="15875">
             <a:solidFill>
-              <a:srgbClr val="CEE2F3"/>
+              <a:srgbClr val="D1E7FA"/>
             </a:solidFill>
           </a:ln>
         </p:spPr>
@@ -4332,7 +4332,7 @@
             <a:avLst/>
           </a:prstGeom>
           <a:solidFill>
-            <a:srgbClr val="275A86"/>
+            <a:srgbClr val="267BC5"/>
           </a:solidFill>
           <a:ln>
             <a:noFill/>
@@ -4390,7 +4390,7 @@
             <a:r>
               <a:rPr sz="1800" b="1" i="0">
                 <a:solidFill>
-                  <a:srgbClr val="122A3F"/>
+                  <a:srgbClr val="113B5F"/>
                 </a:solidFill>
               </a:rPr>
               <a:t>알아야 할 것</a:t>
@@ -4468,11 +4468,11 @@
             </a:avLst>
           </a:prstGeom>
           <a:solidFill>
-            <a:srgbClr val="EFF5FA"/>
+            <a:srgbClr val="EEF5FC"/>
           </a:solidFill>
           <a:ln w="15875">
             <a:solidFill>
-              <a:srgbClr val="CEE2F3"/>
+              <a:srgbClr val="D1E7FA"/>
             </a:solidFill>
           </a:ln>
         </p:spPr>
@@ -4499,7 +4499,7 @@
             <a:avLst/>
           </a:prstGeom>
           <a:solidFill>
-            <a:srgbClr val="275A86"/>
+            <a:srgbClr val="267BC5"/>
           </a:solidFill>
           <a:ln>
             <a:noFill/>
@@ -4557,7 +4557,7 @@
             <a:r>
               <a:rPr sz="1800" b="1" i="0">
                 <a:solidFill>
-                  <a:srgbClr val="122A3F"/>
+                  <a:srgbClr val="113B5F"/>
                 </a:solidFill>
               </a:rPr>
               <a:t>해 볼 것</a:t>
@@ -4635,11 +4635,11 @@
             </a:avLst>
           </a:prstGeom>
           <a:solidFill>
-            <a:srgbClr val="EFF5FA"/>
+            <a:srgbClr val="EEF5FC"/>
           </a:solidFill>
           <a:ln w="15875">
             <a:solidFill>
-              <a:srgbClr val="CEE2F3"/>
+              <a:srgbClr val="D1E7FA"/>
             </a:solidFill>
           </a:ln>
         </p:spPr>
@@ -4666,7 +4666,7 @@
             <a:avLst/>
           </a:prstGeom>
           <a:solidFill>
-            <a:srgbClr val="275A86"/>
+            <a:srgbClr val="267BC5"/>
           </a:solidFill>
           <a:ln>
             <a:noFill/>
@@ -4724,7 +4724,7 @@
             <a:r>
               <a:rPr sz="1800" b="1" i="0">
                 <a:solidFill>
-                  <a:srgbClr val="122A3F"/>
+                  <a:srgbClr val="113B5F"/>
                 </a:solidFill>
               </a:rPr>
               <a:t>기억할 것</a:t>
@@ -4799,7 +4799,7 @@
     <p:bg>
       <p:bgPr>
         <a:solidFill>
-          <a:srgbClr val="EFF5FA"/>
+          <a:srgbClr val="EEF5FC"/>
         </a:solidFill>
         <a:effectLst/>
       </p:bgPr>
@@ -4829,7 +4829,7 @@
             </a:avLst>
           </a:prstGeom>
           <a:solidFill>
-            <a:srgbClr val="CEE2F3"/>
+            <a:srgbClr val="D1E7FA"/>
           </a:solidFill>
           <a:ln>
             <a:noFill/>
@@ -4873,7 +4873,7 @@
             <a:r>
               <a:rPr sz="3000" b="1" i="0">
                 <a:solidFill>
-                  <a:srgbClr val="122A3F"/>
+                  <a:srgbClr val="113B5F"/>
                 </a:solidFill>
               </a:rPr>
               <a:t>한눈에 비교</a:t>
@@ -4898,11 +4898,11 @@
             </a:avLst>
           </a:prstGeom>
           <a:solidFill>
-            <a:srgbClr val="EFF5FA"/>
+            <a:srgbClr val="EEF5FC"/>
           </a:solidFill>
           <a:ln w="12700">
             <a:solidFill>
-              <a:srgbClr val="CEE2F3"/>
+              <a:srgbClr val="D1E7FA"/>
             </a:solidFill>
           </a:ln>
         </p:spPr>
@@ -4931,7 +4931,7 @@
             </a:avLst>
           </a:prstGeom>
           <a:solidFill>
-            <a:srgbClr val="275A86"/>
+            <a:srgbClr val="267BC5"/>
           </a:solidFill>
           <a:ln>
             <a:noFill/>
@@ -5083,11 +5083,11 @@
             </a:avLst>
           </a:prstGeom>
           <a:solidFill>
-            <a:srgbClr val="CEE2F3"/>
+            <a:srgbClr val="D1E7FA"/>
           </a:solidFill>
           <a:ln w="12700">
             <a:solidFill>
-              <a:srgbClr val="CEE2F3"/>
+              <a:srgbClr val="D1E7FA"/>
             </a:solidFill>
           </a:ln>
         </p:spPr>
@@ -5116,7 +5116,7 @@
             </a:avLst>
           </a:prstGeom>
           <a:solidFill>
-            <a:srgbClr val="122A3F"/>
+            <a:srgbClr val="113B5F"/>
           </a:solidFill>
           <a:ln>
             <a:noFill/>
@@ -5265,7 +5265,7 @@
     <p:bg>
       <p:bgPr>
         <a:solidFill>
-          <a:srgbClr val="EFF5FA"/>
+          <a:srgbClr val="EEF5FC"/>
         </a:solidFill>
         <a:effectLst/>
       </p:bgPr>
@@ -5295,7 +5295,7 @@
             </a:avLst>
           </a:prstGeom>
           <a:solidFill>
-            <a:srgbClr val="CEE2F3"/>
+            <a:srgbClr val="D1E7FA"/>
           </a:solidFill>
           <a:ln>
             <a:noFill/>
@@ -5339,7 +5339,7 @@
             <a:r>
               <a:rPr sz="3000" b="1" i="0">
                 <a:solidFill>
-                  <a:srgbClr val="122A3F"/>
+                  <a:srgbClr val="113B5F"/>
                 </a:solidFill>
               </a:rPr>
               <a:t>일정·현황</a:t>
@@ -5391,30 +5391,30 @@
                   <a:tcPr anchor="ctr" marL="73152" marR="73152">
                     <a:lnL w="9525" cap="flat" cmpd="sng" algn="ctr">
                       <a:solidFill>
-                        <a:srgbClr val="275A86"/>
+                        <a:srgbClr val="267BC5"/>
                       </a:solidFill>
                       <a:prstDash val="solid"/>
                     </a:lnL>
                     <a:lnR w="9525" cap="flat" cmpd="sng" algn="ctr">
                       <a:solidFill>
-                        <a:srgbClr val="275A86"/>
+                        <a:srgbClr val="267BC5"/>
                       </a:solidFill>
                       <a:prstDash val="solid"/>
                     </a:lnR>
                     <a:lnT w="9525" cap="flat" cmpd="sng" algn="ctr">
                       <a:solidFill>
-                        <a:srgbClr val="275A86"/>
+                        <a:srgbClr val="267BC5"/>
                       </a:solidFill>
                       <a:prstDash val="solid"/>
                     </a:lnT>
                     <a:lnB w="9525" cap="flat" cmpd="sng" algn="ctr">
                       <a:solidFill>
-                        <a:srgbClr val="275A86"/>
+                        <a:srgbClr val="267BC5"/>
                       </a:solidFill>
                       <a:prstDash val="solid"/>
                     </a:lnB>
                     <a:solidFill>
-                      <a:srgbClr val="275A86"/>
+                      <a:srgbClr val="267BC5"/>
                     </a:solidFill>
                   </a:tcPr>
                 </a:tc>
@@ -5437,30 +5437,30 @@
                   <a:tcPr anchor="ctr" marL="73152" marR="73152">
                     <a:lnL w="9525" cap="flat" cmpd="sng" algn="ctr">
                       <a:solidFill>
-                        <a:srgbClr val="275A86"/>
+                        <a:srgbClr val="267BC5"/>
                       </a:solidFill>
                       <a:prstDash val="solid"/>
                     </a:lnL>
                     <a:lnR w="9525" cap="flat" cmpd="sng" algn="ctr">
                       <a:solidFill>
-                        <a:srgbClr val="275A86"/>
+                        <a:srgbClr val="267BC5"/>
                       </a:solidFill>
                       <a:prstDash val="solid"/>
                     </a:lnR>
                     <a:lnT w="9525" cap="flat" cmpd="sng" algn="ctr">
                       <a:solidFill>
-                        <a:srgbClr val="275A86"/>
+                        <a:srgbClr val="267BC5"/>
                       </a:solidFill>
                       <a:prstDash val="solid"/>
                     </a:lnT>
                     <a:lnB w="9525" cap="flat" cmpd="sng" algn="ctr">
                       <a:solidFill>
-                        <a:srgbClr val="275A86"/>
+                        <a:srgbClr val="267BC5"/>
                       </a:solidFill>
                       <a:prstDash val="solid"/>
                     </a:lnB>
                     <a:solidFill>
-                      <a:srgbClr val="275A86"/>
+                      <a:srgbClr val="267BC5"/>
                     </a:solidFill>
                   </a:tcPr>
                 </a:tc>
@@ -5483,30 +5483,30 @@
                   <a:tcPr anchor="ctr" marL="73152" marR="73152">
                     <a:lnL w="9525" cap="flat" cmpd="sng" algn="ctr">
                       <a:solidFill>
-                        <a:srgbClr val="275A86"/>
+                        <a:srgbClr val="267BC5"/>
                       </a:solidFill>
                       <a:prstDash val="solid"/>
                     </a:lnL>
                     <a:lnR w="9525" cap="flat" cmpd="sng" algn="ctr">
                       <a:solidFill>
-                        <a:srgbClr val="275A86"/>
+                        <a:srgbClr val="267BC5"/>
                       </a:solidFill>
                       <a:prstDash val="solid"/>
                     </a:lnR>
                     <a:lnT w="9525" cap="flat" cmpd="sng" algn="ctr">
                       <a:solidFill>
-                        <a:srgbClr val="275A86"/>
+                        <a:srgbClr val="267BC5"/>
                       </a:solidFill>
                       <a:prstDash val="solid"/>
                     </a:lnT>
                     <a:lnB w="9525" cap="flat" cmpd="sng" algn="ctr">
                       <a:solidFill>
-                        <a:srgbClr val="275A86"/>
+                        <a:srgbClr val="267BC5"/>
                       </a:solidFill>
                       <a:prstDash val="solid"/>
                     </a:lnB>
                     <a:solidFill>
-                      <a:srgbClr val="275A86"/>
+                      <a:srgbClr val="267BC5"/>
                     </a:solidFill>
                   </a:tcPr>
                 </a:tc>
@@ -5529,30 +5529,30 @@
                   <a:tcPr anchor="ctr" marL="73152" marR="73152">
                     <a:lnL w="9525" cap="flat" cmpd="sng" algn="ctr">
                       <a:solidFill>
-                        <a:srgbClr val="275A86"/>
+                        <a:srgbClr val="267BC5"/>
                       </a:solidFill>
                       <a:prstDash val="solid"/>
                     </a:lnL>
                     <a:lnR w="9525" cap="flat" cmpd="sng" algn="ctr">
                       <a:solidFill>
-                        <a:srgbClr val="275A86"/>
+                        <a:srgbClr val="267BC5"/>
                       </a:solidFill>
                       <a:prstDash val="solid"/>
                     </a:lnR>
                     <a:lnT w="9525" cap="flat" cmpd="sng" algn="ctr">
                       <a:solidFill>
-                        <a:srgbClr val="275A86"/>
+                        <a:srgbClr val="267BC5"/>
                       </a:solidFill>
                       <a:prstDash val="solid"/>
                     </a:lnT>
                     <a:lnB w="9525" cap="flat" cmpd="sng" algn="ctr">
                       <a:solidFill>
-                        <a:srgbClr val="275A86"/>
+                        <a:srgbClr val="267BC5"/>
                       </a:solidFill>
                       <a:prstDash val="solid"/>
                     </a:lnB>
                     <a:solidFill>
-                      <a:srgbClr val="275A86"/>
+                      <a:srgbClr val="267BC5"/>
                     </a:solidFill>
                   </a:tcPr>
                 </a:tc>
@@ -5567,7 +5567,7 @@
                       <a:r>
                         <a:rPr sz="1500" b="1">
                           <a:solidFill>
-                            <a:srgbClr val="122A3F"/>
+                            <a:srgbClr val="113B5F"/>
                           </a:solidFill>
                         </a:rPr>
                         <a:t>1</a:t>
@@ -5577,30 +5577,30 @@
                   <a:tcPr anchor="ctr" marL="73152" marR="73152">
                     <a:lnL w="9525" cap="flat" cmpd="sng" algn="ctr">
                       <a:solidFill>
-                        <a:srgbClr val="CEE2F3"/>
+                        <a:srgbClr val="D1E7FA"/>
                       </a:solidFill>
                       <a:prstDash val="solid"/>
                     </a:lnL>
                     <a:lnR w="9525" cap="flat" cmpd="sng" algn="ctr">
                       <a:solidFill>
-                        <a:srgbClr val="CEE2F3"/>
+                        <a:srgbClr val="D1E7FA"/>
                       </a:solidFill>
                       <a:prstDash val="solid"/>
                     </a:lnR>
                     <a:lnT w="9525" cap="flat" cmpd="sng" algn="ctr">
                       <a:solidFill>
-                        <a:srgbClr val="CEE2F3"/>
+                        <a:srgbClr val="D1E7FA"/>
                       </a:solidFill>
                       <a:prstDash val="solid"/>
                     </a:lnT>
                     <a:lnB w="9525" cap="flat" cmpd="sng" algn="ctr">
                       <a:solidFill>
-                        <a:srgbClr val="CEE2F3"/>
+                        <a:srgbClr val="D1E7FA"/>
                       </a:solidFill>
                       <a:prstDash val="solid"/>
                     </a:lnB>
                     <a:solidFill>
-                      <a:srgbClr val="CEE2F3"/>
+                      <a:srgbClr val="D1E7FA"/>
                     </a:solidFill>
                   </a:tcPr>
                 </a:tc>
@@ -5623,25 +5623,25 @@
                   <a:tcPr anchor="ctr" marL="73152" marR="73152">
                     <a:lnL w="9525" cap="flat" cmpd="sng" algn="ctr">
                       <a:solidFill>
-                        <a:srgbClr val="CEE2F3"/>
+                        <a:srgbClr val="D1E7FA"/>
                       </a:solidFill>
                       <a:prstDash val="solid"/>
                     </a:lnL>
                     <a:lnR w="9525" cap="flat" cmpd="sng" algn="ctr">
                       <a:solidFill>
-                        <a:srgbClr val="CEE2F3"/>
+                        <a:srgbClr val="D1E7FA"/>
                       </a:solidFill>
                       <a:prstDash val="solid"/>
                     </a:lnR>
                     <a:lnT w="9525" cap="flat" cmpd="sng" algn="ctr">
                       <a:solidFill>
-                        <a:srgbClr val="CEE2F3"/>
+                        <a:srgbClr val="D1E7FA"/>
                       </a:solidFill>
                       <a:prstDash val="solid"/>
                     </a:lnT>
                     <a:lnB w="9525" cap="flat" cmpd="sng" algn="ctr">
                       <a:solidFill>
-                        <a:srgbClr val="CEE2F3"/>
+                        <a:srgbClr val="D1E7FA"/>
                       </a:solidFill>
                       <a:prstDash val="solid"/>
                     </a:lnB>
@@ -5669,25 +5669,25 @@
                   <a:tcPr anchor="ctr" marL="73152" marR="73152">
                     <a:lnL w="9525" cap="flat" cmpd="sng" algn="ctr">
                       <a:solidFill>
-                        <a:srgbClr val="CEE2F3"/>
+                        <a:srgbClr val="D1E7FA"/>
                       </a:solidFill>
                       <a:prstDash val="solid"/>
                     </a:lnL>
                     <a:lnR w="9525" cap="flat" cmpd="sng" algn="ctr">
                       <a:solidFill>
-                        <a:srgbClr val="CEE2F3"/>
+                        <a:srgbClr val="D1E7FA"/>
                       </a:solidFill>
                       <a:prstDash val="solid"/>
                     </a:lnR>
                     <a:lnT w="9525" cap="flat" cmpd="sng" algn="ctr">
                       <a:solidFill>
-                        <a:srgbClr val="CEE2F3"/>
+                        <a:srgbClr val="D1E7FA"/>
                       </a:solidFill>
                       <a:prstDash val="solid"/>
                     </a:lnT>
                     <a:lnB w="9525" cap="flat" cmpd="sng" algn="ctr">
                       <a:solidFill>
-                        <a:srgbClr val="CEE2F3"/>
+                        <a:srgbClr val="D1E7FA"/>
                       </a:solidFill>
                       <a:prstDash val="solid"/>
                     </a:lnB>
@@ -5715,25 +5715,25 @@
                   <a:tcPr anchor="ctr" marL="73152" marR="73152">
                     <a:lnL w="9525" cap="flat" cmpd="sng" algn="ctr">
                       <a:solidFill>
-                        <a:srgbClr val="CEE2F3"/>
+                        <a:srgbClr val="D1E7FA"/>
                       </a:solidFill>
                       <a:prstDash val="solid"/>
                     </a:lnL>
                     <a:lnR w="9525" cap="flat" cmpd="sng" algn="ctr">
                       <a:solidFill>
-                        <a:srgbClr val="CEE2F3"/>
+                        <a:srgbClr val="D1E7FA"/>
                       </a:solidFill>
                       <a:prstDash val="solid"/>
                     </a:lnR>
                     <a:lnT w="9525" cap="flat" cmpd="sng" algn="ctr">
                       <a:solidFill>
-                        <a:srgbClr val="CEE2F3"/>
+                        <a:srgbClr val="D1E7FA"/>
                       </a:solidFill>
                       <a:prstDash val="solid"/>
                     </a:lnT>
                     <a:lnB w="9525" cap="flat" cmpd="sng" algn="ctr">
                       <a:solidFill>
-                        <a:srgbClr val="CEE2F3"/>
+                        <a:srgbClr val="D1E7FA"/>
                       </a:solidFill>
                       <a:prstDash val="solid"/>
                     </a:lnB>
@@ -5753,7 +5753,7 @@
                       <a:r>
                         <a:rPr sz="1500" b="1">
                           <a:solidFill>
-                            <a:srgbClr val="122A3F"/>
+                            <a:srgbClr val="113B5F"/>
                           </a:solidFill>
                         </a:rPr>
                         <a:t>2</a:t>
@@ -5763,30 +5763,30 @@
                   <a:tcPr anchor="ctr" marL="73152" marR="73152">
                     <a:lnL w="9525" cap="flat" cmpd="sng" algn="ctr">
                       <a:solidFill>
-                        <a:srgbClr val="CEE2F3"/>
+                        <a:srgbClr val="D1E7FA"/>
                       </a:solidFill>
                       <a:prstDash val="solid"/>
                     </a:lnL>
                     <a:lnR w="9525" cap="flat" cmpd="sng" algn="ctr">
                       <a:solidFill>
-                        <a:srgbClr val="CEE2F3"/>
+                        <a:srgbClr val="D1E7FA"/>
                       </a:solidFill>
                       <a:prstDash val="solid"/>
                     </a:lnR>
                     <a:lnT w="9525" cap="flat" cmpd="sng" algn="ctr">
                       <a:solidFill>
-                        <a:srgbClr val="CEE2F3"/>
+                        <a:srgbClr val="D1E7FA"/>
                       </a:solidFill>
                       <a:prstDash val="solid"/>
                     </a:lnT>
                     <a:lnB w="9525" cap="flat" cmpd="sng" algn="ctr">
                       <a:solidFill>
-                        <a:srgbClr val="CEE2F3"/>
+                        <a:srgbClr val="D1E7FA"/>
                       </a:solidFill>
                       <a:prstDash val="solid"/>
                     </a:lnB>
                     <a:solidFill>
-                      <a:srgbClr val="CEE2F3"/>
+                      <a:srgbClr val="D1E7FA"/>
                     </a:solidFill>
                   </a:tcPr>
                 </a:tc>
@@ -5809,30 +5809,30 @@
                   <a:tcPr anchor="ctr" marL="73152" marR="73152">
                     <a:lnL w="9525" cap="flat" cmpd="sng" algn="ctr">
                       <a:solidFill>
-                        <a:srgbClr val="CEE2F3"/>
+                        <a:srgbClr val="D1E7FA"/>
                       </a:solidFill>
                       <a:prstDash val="solid"/>
                     </a:lnL>
                     <a:lnR w="9525" cap="flat" cmpd="sng" algn="ctr">
                       <a:solidFill>
-                        <a:srgbClr val="CEE2F3"/>
+                        <a:srgbClr val="D1E7FA"/>
                       </a:solidFill>
                       <a:prstDash val="solid"/>
                     </a:lnR>
                     <a:lnT w="9525" cap="flat" cmpd="sng" algn="ctr">
                       <a:solidFill>
-                        <a:srgbClr val="CEE2F3"/>
+                        <a:srgbClr val="D1E7FA"/>
                       </a:solidFill>
                       <a:prstDash val="solid"/>
                     </a:lnT>
                     <a:lnB w="9525" cap="flat" cmpd="sng" algn="ctr">
                       <a:solidFill>
-                        <a:srgbClr val="CEE2F3"/>
+                        <a:srgbClr val="D1E7FA"/>
                       </a:solidFill>
                       <a:prstDash val="solid"/>
                     </a:lnB>
                     <a:solidFill>
-                      <a:srgbClr val="EFF5FA"/>
+                      <a:srgbClr val="EEF5FC"/>
                     </a:solidFill>
                   </a:tcPr>
                 </a:tc>
@@ -5855,30 +5855,30 @@
                   <a:tcPr anchor="ctr" marL="73152" marR="73152">
                     <a:lnL w="9525" cap="flat" cmpd="sng" algn="ctr">
                       <a:solidFill>
-                        <a:srgbClr val="CEE2F3"/>
+                        <a:srgbClr val="D1E7FA"/>
                       </a:solidFill>
                       <a:prstDash val="solid"/>
                     </a:lnL>
                     <a:lnR w="9525" cap="flat" cmpd="sng" algn="ctr">
                       <a:solidFill>
-                        <a:srgbClr val="CEE2F3"/>
+                        <a:srgbClr val="D1E7FA"/>
                       </a:solidFill>
                       <a:prstDash val="solid"/>
                     </a:lnR>
                     <a:lnT w="9525" cap="flat" cmpd="sng" algn="ctr">
                       <a:solidFill>
-                        <a:srgbClr val="CEE2F3"/>
+                        <a:srgbClr val="D1E7FA"/>
                       </a:solidFill>
                       <a:prstDash val="solid"/>
                     </a:lnT>
                     <a:lnB w="9525" cap="flat" cmpd="sng" algn="ctr">
                       <a:solidFill>
-                        <a:srgbClr val="CEE2F3"/>
+                        <a:srgbClr val="D1E7FA"/>
                       </a:solidFill>
                       <a:prstDash val="solid"/>
                     </a:lnB>
                     <a:solidFill>
-                      <a:srgbClr val="EFF5FA"/>
+                      <a:srgbClr val="EEF5FC"/>
                     </a:solidFill>
                   </a:tcPr>
                 </a:tc>
@@ -5901,30 +5901,30 @@
                   <a:tcPr anchor="ctr" marL="73152" marR="73152">
                     <a:lnL w="9525" cap="flat" cmpd="sng" algn="ctr">
                       <a:solidFill>
-                        <a:srgbClr val="CEE2F3"/>
+                        <a:srgbClr val="D1E7FA"/>
                       </a:solidFill>
                       <a:prstDash val="solid"/>
                     </a:lnL>
                     <a:lnR w="9525" cap="flat" cmpd="sng" algn="ctr">
                       <a:solidFill>
-                        <a:srgbClr val="CEE2F3"/>
+                        <a:srgbClr val="D1E7FA"/>
                       </a:solidFill>
                       <a:prstDash val="solid"/>
                     </a:lnR>
                     <a:lnT w="9525" cap="flat" cmpd="sng" algn="ctr">
                       <a:solidFill>
-                        <a:srgbClr val="CEE2F3"/>
+                        <a:srgbClr val="D1E7FA"/>
                       </a:solidFill>
                       <a:prstDash val="solid"/>
                     </a:lnT>
                     <a:lnB w="9525" cap="flat" cmpd="sng" algn="ctr">
                       <a:solidFill>
-                        <a:srgbClr val="CEE2F3"/>
+                        <a:srgbClr val="D1E7FA"/>
                       </a:solidFill>
                       <a:prstDash val="solid"/>
                     </a:lnB>
                     <a:solidFill>
-                      <a:srgbClr val="EFF5FA"/>
+                      <a:srgbClr val="EEF5FC"/>
                     </a:solidFill>
                   </a:tcPr>
                 </a:tc>
@@ -5939,7 +5939,7 @@
                       <a:r>
                         <a:rPr sz="1500" b="1">
                           <a:solidFill>
-                            <a:srgbClr val="122A3F"/>
+                            <a:srgbClr val="113B5F"/>
                           </a:solidFill>
                         </a:rPr>
                         <a:t>3</a:t>
@@ -5949,30 +5949,30 @@
                   <a:tcPr anchor="ctr" marL="73152" marR="73152">
                     <a:lnL w="9525" cap="flat" cmpd="sng" algn="ctr">
                       <a:solidFill>
-                        <a:srgbClr val="CEE2F3"/>
+                        <a:srgbClr val="D1E7FA"/>
                       </a:solidFill>
                       <a:prstDash val="solid"/>
                     </a:lnL>
                     <a:lnR w="9525" cap="flat" cmpd="sng" algn="ctr">
                       <a:solidFill>
-                        <a:srgbClr val="CEE2F3"/>
+                        <a:srgbClr val="D1E7FA"/>
                       </a:solidFill>
                       <a:prstDash val="solid"/>
                     </a:lnR>
                     <a:lnT w="9525" cap="flat" cmpd="sng" algn="ctr">
                       <a:solidFill>
-                        <a:srgbClr val="CEE2F3"/>
+                        <a:srgbClr val="D1E7FA"/>
                       </a:solidFill>
                       <a:prstDash val="solid"/>
                     </a:lnT>
                     <a:lnB w="9525" cap="flat" cmpd="sng" algn="ctr">
                       <a:solidFill>
-                        <a:srgbClr val="CEE2F3"/>
+                        <a:srgbClr val="D1E7FA"/>
                       </a:solidFill>
                       <a:prstDash val="solid"/>
                     </a:lnB>
                     <a:solidFill>
-                      <a:srgbClr val="CEE2F3"/>
+                      <a:srgbClr val="D1E7FA"/>
                     </a:solidFill>
                   </a:tcPr>
                 </a:tc>
@@ -5995,25 +5995,25 @@
                   <a:tcPr anchor="ctr" marL="73152" marR="73152">
                     <a:lnL w="9525" cap="flat" cmpd="sng" algn="ctr">
                       <a:solidFill>
-                        <a:srgbClr val="CEE2F3"/>
+                        <a:srgbClr val="D1E7FA"/>
                       </a:solidFill>
                       <a:prstDash val="solid"/>
                     </a:lnL>
                     <a:lnR w="9525" cap="flat" cmpd="sng" algn="ctr">
                       <a:solidFill>
-                        <a:srgbClr val="CEE2F3"/>
+                        <a:srgbClr val="D1E7FA"/>
                       </a:solidFill>
                       <a:prstDash val="solid"/>
                     </a:lnR>
                     <a:lnT w="9525" cap="flat" cmpd="sng" algn="ctr">
                       <a:solidFill>
-                        <a:srgbClr val="CEE2F3"/>
+                        <a:srgbClr val="D1E7FA"/>
                       </a:solidFill>
                       <a:prstDash val="solid"/>
                     </a:lnT>
                     <a:lnB w="9525" cap="flat" cmpd="sng" algn="ctr">
                       <a:solidFill>
-                        <a:srgbClr val="CEE2F3"/>
+                        <a:srgbClr val="D1E7FA"/>
                       </a:solidFill>
                       <a:prstDash val="solid"/>
                     </a:lnB>
@@ -6041,25 +6041,25 @@
                   <a:tcPr anchor="ctr" marL="73152" marR="73152">
                     <a:lnL w="9525" cap="flat" cmpd="sng" algn="ctr">
                       <a:solidFill>
-                        <a:srgbClr val="CEE2F3"/>
+                        <a:srgbClr val="D1E7FA"/>
                       </a:solidFill>
                       <a:prstDash val="solid"/>
                     </a:lnL>
                     <a:lnR w="9525" cap="flat" cmpd="sng" algn="ctr">
                       <a:solidFill>
-                        <a:srgbClr val="CEE2F3"/>
+                        <a:srgbClr val="D1E7FA"/>
                       </a:solidFill>
                       <a:prstDash val="solid"/>
                     </a:lnR>
                     <a:lnT w="9525" cap="flat" cmpd="sng" algn="ctr">
                       <a:solidFill>
-                        <a:srgbClr val="CEE2F3"/>
+                        <a:srgbClr val="D1E7FA"/>
                       </a:solidFill>
                       <a:prstDash val="solid"/>
                     </a:lnT>
                     <a:lnB w="9525" cap="flat" cmpd="sng" algn="ctr">
                       <a:solidFill>
-                        <a:srgbClr val="CEE2F3"/>
+                        <a:srgbClr val="D1E7FA"/>
                       </a:solidFill>
                       <a:prstDash val="solid"/>
                     </a:lnB>
@@ -6087,25 +6087,25 @@
                   <a:tcPr anchor="ctr" marL="73152" marR="73152">
                     <a:lnL w="9525" cap="flat" cmpd="sng" algn="ctr">
                       <a:solidFill>
-                        <a:srgbClr val="CEE2F3"/>
+                        <a:srgbClr val="D1E7FA"/>
                       </a:solidFill>
                       <a:prstDash val="solid"/>
                     </a:lnL>
                     <a:lnR w="9525" cap="flat" cmpd="sng" algn="ctr">
                       <a:solidFill>
-                        <a:srgbClr val="CEE2F3"/>
+                        <a:srgbClr val="D1E7FA"/>
                       </a:solidFill>
                       <a:prstDash val="solid"/>
                     </a:lnR>
                     <a:lnT w="9525" cap="flat" cmpd="sng" algn="ctr">
                       <a:solidFill>
-                        <a:srgbClr val="CEE2F3"/>
+                        <a:srgbClr val="D1E7FA"/>
                       </a:solidFill>
                       <a:prstDash val="solid"/>
                     </a:lnT>
                     <a:lnB w="9525" cap="flat" cmpd="sng" algn="ctr">
                       <a:solidFill>
-                        <a:srgbClr val="CEE2F3"/>
+                        <a:srgbClr val="D1E7FA"/>
                       </a:solidFill>
                       <a:prstDash val="solid"/>
                     </a:lnB>
@@ -6125,7 +6125,7 @@
                       <a:r>
                         <a:rPr sz="1500" b="1">
                           <a:solidFill>
-                            <a:srgbClr val="122A3F"/>
+                            <a:srgbClr val="113B5F"/>
                           </a:solidFill>
                         </a:rPr>
                         <a:t>4</a:t>
@@ -6135,30 +6135,30 @@
                   <a:tcPr anchor="ctr" marL="73152" marR="73152">
                     <a:lnL w="9525" cap="flat" cmpd="sng" algn="ctr">
                       <a:solidFill>
-                        <a:srgbClr val="CEE2F3"/>
+                        <a:srgbClr val="D1E7FA"/>
                       </a:solidFill>
                       <a:prstDash val="solid"/>
                     </a:lnL>
                     <a:lnR w="9525" cap="flat" cmpd="sng" algn="ctr">
                       <a:solidFill>
-                        <a:srgbClr val="CEE2F3"/>
+                        <a:srgbClr val="D1E7FA"/>
                       </a:solidFill>
                       <a:prstDash val="solid"/>
                     </a:lnR>
                     <a:lnT w="9525" cap="flat" cmpd="sng" algn="ctr">
                       <a:solidFill>
-                        <a:srgbClr val="CEE2F3"/>
+                        <a:srgbClr val="D1E7FA"/>
                       </a:solidFill>
                       <a:prstDash val="solid"/>
                     </a:lnT>
                     <a:lnB w="9525" cap="flat" cmpd="sng" algn="ctr">
                       <a:solidFill>
-                        <a:srgbClr val="CEE2F3"/>
+                        <a:srgbClr val="D1E7FA"/>
                       </a:solidFill>
                       <a:prstDash val="solid"/>
                     </a:lnB>
                     <a:solidFill>
-                      <a:srgbClr val="CEE2F3"/>
+                      <a:srgbClr val="D1E7FA"/>
                     </a:solidFill>
                   </a:tcPr>
                 </a:tc>
@@ -6181,30 +6181,30 @@
                   <a:tcPr anchor="ctr" marL="73152" marR="73152">
                     <a:lnL w="9525" cap="flat" cmpd="sng" algn="ctr">
                       <a:solidFill>
-                        <a:srgbClr val="CEE2F3"/>
+                        <a:srgbClr val="D1E7FA"/>
                       </a:solidFill>
                       <a:prstDash val="solid"/>
                     </a:lnL>
                     <a:lnR w="9525" cap="flat" cmpd="sng" algn="ctr">
                       <a:solidFill>
-                        <a:srgbClr val="CEE2F3"/>
+                        <a:srgbClr val="D1E7FA"/>
                       </a:solidFill>
                       <a:prstDash val="solid"/>
                     </a:lnR>
                     <a:lnT w="9525" cap="flat" cmpd="sng" algn="ctr">
                       <a:solidFill>
-                        <a:srgbClr val="CEE2F3"/>
+                        <a:srgbClr val="D1E7FA"/>
                       </a:solidFill>
                       <a:prstDash val="solid"/>
                     </a:lnT>
                     <a:lnB w="9525" cap="flat" cmpd="sng" algn="ctr">
                       <a:solidFill>
-                        <a:srgbClr val="CEE2F3"/>
+                        <a:srgbClr val="D1E7FA"/>
                       </a:solidFill>
                       <a:prstDash val="solid"/>
                     </a:lnB>
                     <a:solidFill>
-                      <a:srgbClr val="EFF5FA"/>
+                      <a:srgbClr val="EEF5FC"/>
                     </a:solidFill>
                   </a:tcPr>
                 </a:tc>
@@ -6227,30 +6227,30 @@
                   <a:tcPr anchor="ctr" marL="73152" marR="73152">
                     <a:lnL w="9525" cap="flat" cmpd="sng" algn="ctr">
                       <a:solidFill>
-                        <a:srgbClr val="CEE2F3"/>
+                        <a:srgbClr val="D1E7FA"/>
                       </a:solidFill>
                       <a:prstDash val="solid"/>
                     </a:lnL>
                     <a:lnR w="9525" cap="flat" cmpd="sng" algn="ctr">
                       <a:solidFill>
-                        <a:srgbClr val="CEE2F3"/>
+                        <a:srgbClr val="D1E7FA"/>
                       </a:solidFill>
                       <a:prstDash val="solid"/>
                     </a:lnR>
                     <a:lnT w="9525" cap="flat" cmpd="sng" algn="ctr">
                       <a:solidFill>
-                        <a:srgbClr val="CEE2F3"/>
+                        <a:srgbClr val="D1E7FA"/>
                       </a:solidFill>
                       <a:prstDash val="solid"/>
                     </a:lnT>
                     <a:lnB w="9525" cap="flat" cmpd="sng" algn="ctr">
                       <a:solidFill>
-                        <a:srgbClr val="CEE2F3"/>
+                        <a:srgbClr val="D1E7FA"/>
                       </a:solidFill>
                       <a:prstDash val="solid"/>
                     </a:lnB>
                     <a:solidFill>
-                      <a:srgbClr val="EFF5FA"/>
+                      <a:srgbClr val="EEF5FC"/>
                     </a:solidFill>
                   </a:tcPr>
                 </a:tc>
@@ -6273,30 +6273,30 @@
                   <a:tcPr anchor="ctr" marL="73152" marR="73152">
                     <a:lnL w="9525" cap="flat" cmpd="sng" algn="ctr">
                       <a:solidFill>
-                        <a:srgbClr val="CEE2F3"/>
+                        <a:srgbClr val="D1E7FA"/>
                       </a:solidFill>
                       <a:prstDash val="solid"/>
                     </a:lnL>
                     <a:lnR w="9525" cap="flat" cmpd="sng" algn="ctr">
                       <a:solidFill>
-                        <a:srgbClr val="CEE2F3"/>
+                        <a:srgbClr val="D1E7FA"/>
                       </a:solidFill>
                       <a:prstDash val="solid"/>
                     </a:lnR>
                     <a:lnT w="9525" cap="flat" cmpd="sng" algn="ctr">
                       <a:solidFill>
-                        <a:srgbClr val="CEE2F3"/>
+                        <a:srgbClr val="D1E7FA"/>
                       </a:solidFill>
                       <a:prstDash val="solid"/>
                     </a:lnT>
                     <a:lnB w="9525" cap="flat" cmpd="sng" algn="ctr">
                       <a:solidFill>
-                        <a:srgbClr val="CEE2F3"/>
+                        <a:srgbClr val="D1E7FA"/>
                       </a:solidFill>
                       <a:prstDash val="solid"/>
                     </a:lnB>
                     <a:solidFill>
-                      <a:srgbClr val="EFF5FA"/>
+                      <a:srgbClr val="EEF5FC"/>
                     </a:solidFill>
                   </a:tcPr>
                 </a:tc>
@@ -6311,7 +6311,7 @@
                       <a:r>
                         <a:rPr sz="1500" b="1">
                           <a:solidFill>
-                            <a:srgbClr val="122A3F"/>
+                            <a:srgbClr val="113B5F"/>
                           </a:solidFill>
                         </a:rPr>
                         <a:t>5</a:t>
@@ -6321,30 +6321,30 @@
                   <a:tcPr anchor="ctr" marL="73152" marR="73152">
                     <a:lnL w="9525" cap="flat" cmpd="sng" algn="ctr">
                       <a:solidFill>
-                        <a:srgbClr val="CEE2F3"/>
+                        <a:srgbClr val="D1E7FA"/>
                       </a:solidFill>
                       <a:prstDash val="solid"/>
                     </a:lnL>
                     <a:lnR w="9525" cap="flat" cmpd="sng" algn="ctr">
                       <a:solidFill>
-                        <a:srgbClr val="CEE2F3"/>
+                        <a:srgbClr val="D1E7FA"/>
                       </a:solidFill>
                       <a:prstDash val="solid"/>
                     </a:lnR>
                     <a:lnT w="9525" cap="flat" cmpd="sng" algn="ctr">
                       <a:solidFill>
-                        <a:srgbClr val="CEE2F3"/>
+                        <a:srgbClr val="D1E7FA"/>
                       </a:solidFill>
                       <a:prstDash val="solid"/>
                     </a:lnT>
                     <a:lnB w="9525" cap="flat" cmpd="sng" algn="ctr">
                       <a:solidFill>
-                        <a:srgbClr val="CEE2F3"/>
+                        <a:srgbClr val="D1E7FA"/>
                       </a:solidFill>
                       <a:prstDash val="solid"/>
                     </a:lnB>
                     <a:solidFill>
-                      <a:srgbClr val="CEE2F3"/>
+                      <a:srgbClr val="D1E7FA"/>
                     </a:solidFill>
                   </a:tcPr>
                 </a:tc>
@@ -6367,25 +6367,25 @@
                   <a:tcPr anchor="ctr" marL="73152" marR="73152">
                     <a:lnL w="9525" cap="flat" cmpd="sng" algn="ctr">
                       <a:solidFill>
-                        <a:srgbClr val="CEE2F3"/>
+                        <a:srgbClr val="D1E7FA"/>
                       </a:solidFill>
                       <a:prstDash val="solid"/>
                     </a:lnL>
                     <a:lnR w="9525" cap="flat" cmpd="sng" algn="ctr">
                       <a:solidFill>
-                        <a:srgbClr val="CEE2F3"/>
+                        <a:srgbClr val="D1E7FA"/>
                       </a:solidFill>
                       <a:prstDash val="solid"/>
                     </a:lnR>
                     <a:lnT w="9525" cap="flat" cmpd="sng" algn="ctr">
                       <a:solidFill>
-                        <a:srgbClr val="CEE2F3"/>
+                        <a:srgbClr val="D1E7FA"/>
                       </a:solidFill>
                       <a:prstDash val="solid"/>
                     </a:lnT>
                     <a:lnB w="9525" cap="flat" cmpd="sng" algn="ctr">
                       <a:solidFill>
-                        <a:srgbClr val="CEE2F3"/>
+                        <a:srgbClr val="D1E7FA"/>
                       </a:solidFill>
                       <a:prstDash val="solid"/>
                     </a:lnB>
@@ -6413,25 +6413,25 @@
                   <a:tcPr anchor="ctr" marL="73152" marR="73152">
                     <a:lnL w="9525" cap="flat" cmpd="sng" algn="ctr">
                       <a:solidFill>
-                        <a:srgbClr val="CEE2F3"/>
+                        <a:srgbClr val="D1E7FA"/>
                       </a:solidFill>
                       <a:prstDash val="solid"/>
                     </a:lnL>
                     <a:lnR w="9525" cap="flat" cmpd="sng" algn="ctr">
                       <a:solidFill>
-                        <a:srgbClr val="CEE2F3"/>
+                        <a:srgbClr val="D1E7FA"/>
                       </a:solidFill>
                       <a:prstDash val="solid"/>
                     </a:lnR>
                     <a:lnT w="9525" cap="flat" cmpd="sng" algn="ctr">
                       <a:solidFill>
-                        <a:srgbClr val="CEE2F3"/>
+                        <a:srgbClr val="D1E7FA"/>
                       </a:solidFill>
                       <a:prstDash val="solid"/>
                     </a:lnT>
                     <a:lnB w="9525" cap="flat" cmpd="sng" algn="ctr">
                       <a:solidFill>
-                        <a:srgbClr val="CEE2F3"/>
+                        <a:srgbClr val="D1E7FA"/>
                       </a:solidFill>
                       <a:prstDash val="solid"/>
                     </a:lnB>
@@ -6459,25 +6459,25 @@
                   <a:tcPr anchor="ctr" marL="73152" marR="73152">
                     <a:lnL w="9525" cap="flat" cmpd="sng" algn="ctr">
                       <a:solidFill>
-                        <a:srgbClr val="CEE2F3"/>
+                        <a:srgbClr val="D1E7FA"/>
                       </a:solidFill>
                       <a:prstDash val="solid"/>
                     </a:lnL>
                     <a:lnR w="9525" cap="flat" cmpd="sng" algn="ctr">
                       <a:solidFill>
-                        <a:srgbClr val="CEE2F3"/>
+                        <a:srgbClr val="D1E7FA"/>
                       </a:solidFill>
                       <a:prstDash val="solid"/>
                     </a:lnR>
                     <a:lnT w="9525" cap="flat" cmpd="sng" algn="ctr">
                       <a:solidFill>
-                        <a:srgbClr val="CEE2F3"/>
+                        <a:srgbClr val="D1E7FA"/>
                       </a:solidFill>
                       <a:prstDash val="solid"/>
                     </a:lnT>
                     <a:lnB w="9525" cap="flat" cmpd="sng" algn="ctr">
                       <a:solidFill>
-                        <a:srgbClr val="CEE2F3"/>
+                        <a:srgbClr val="D1E7FA"/>
                       </a:solidFill>
                       <a:prstDash val="solid"/>
                     </a:lnB>
@@ -6563,7 +6563,7 @@
             <a:r>
               <a:rPr sz="3600" b="1" i="0">
                 <a:solidFill>
-                  <a:srgbClr val="122A3F"/>
+                  <a:srgbClr val="113B5F"/>
                 </a:solidFill>
               </a:rPr>
               <a:t>감사합니다</a:t>
@@ -6601,7 +6601,7 @@
             <a:r>
               <a:rPr sz="1700" b="0" i="1">
                 <a:solidFill>
-                  <a:srgbClr val="122A3F"/>
+                  <a:srgbClr val="113B5F"/>
                 </a:solidFill>
               </a:rPr>
               <a:t>끝까지 들어 주셔서 고맙습니다</a:t>
@@ -6666,34 +6666,34 @@
         <a:sysClr val="window" lastClr="FFFFFF"/>
       </a:lt1>
       <a:dk2>
-        <a:srgbClr val="122A3F"/>
+        <a:srgbClr val="113B5F"/>
       </a:dk2>
       <a:lt2>
-        <a:srgbClr val="EFF5FA"/>
+        <a:srgbClr val="EEF5FC"/>
       </a:lt2>
       <a:accent1>
-        <a:srgbClr val="275A86"/>
+        <a:srgbClr val="267BC5"/>
       </a:accent1>
       <a:accent2>
-        <a:srgbClr val="913B3E"/>
+        <a:srgbClr val="209DB6"/>
       </a:accent2>
       <a:accent3>
-        <a:srgbClr val="122A3F"/>
+        <a:srgbClr val="113B5F"/>
       </a:accent3>
       <a:accent4>
-        <a:srgbClr val="CEE2F3"/>
+        <a:srgbClr val="D1E7FA"/>
       </a:accent4>
       <a:accent5>
-        <a:srgbClr val="5C4A62"/>
+        <a:srgbClr val="238CBE"/>
       </a:accent5>
       <a:accent6>
-        <a:srgbClr val="717F8C"/>
+        <a:srgbClr val="70899F"/>
       </a:accent6>
       <a:hlink>
-        <a:srgbClr val="275A86"/>
+        <a:srgbClr val="267BC5"/>
       </a:hlink>
       <a:folHlink>
-        <a:srgbClr val="122A3F"/>
+        <a:srgbClr val="113B5F"/>
       </a:folHlink>
     </a:clrScheme>
     <a:fontScheme name="Office">

--- a/public/fun/pack/pptx/talk/발표템플릿_22_교육·강의_섬마을선착장.pptx
+++ b/public/fun/pack/pptx/talk/발표템플릿_22_교육·강의_섬마을선착장.pptx
@@ -3286,6 +3286,14 @@
 <file path=ppt/slides/slide1.xml><?xml version="1.0" encoding="utf-8"?>
 <p:sld xmlns:a="http://schemas.openxmlformats.org/drawingml/2006/main" xmlns:p="http://schemas.openxmlformats.org/presentationml/2006/main" xmlns:r="http://schemas.openxmlformats.org/officeDocument/2006/relationships">
   <p:cSld>
+    <p:bg>
+      <p:bgPr>
+        <a:solidFill>
+          <a:srgbClr val="EAF4FD"/>
+        </a:solidFill>
+        <a:effectLst/>
+      </p:bgPr>
+    </p:bg>
     <p:spTree>
       <p:nvGrpSpPr>
         <p:cNvPr id="1" name=""/>
@@ -3293,30 +3301,102 @@
         <p:nvPr/>
       </p:nvGrpSpPr>
       <p:grpSpPr/>
-      <p:pic>
-        <p:nvPicPr>
-          <p:cNvPr id="3" name="표지 그림" descr="talk-22.jpg"/>
-          <p:cNvPicPr>
-            <a:picLocks noChangeAspect="1"/>
-          </p:cNvPicPr>
+      <p:sp>
+        <p:nvSpPr>
+          <p:cNvPr id="3" name="장식"/>
+          <p:cNvSpPr/>
           <p:nvPr/>
-        </p:nvPicPr>
-        <p:blipFill>
-          <a:blip r:embed="rId2"/>
-          <a:stretch>
-            <a:fillRect/>
-          </a:stretch>
-        </p:blipFill>
-        <p:spPr>
-          <a:xfrm>
-            <a:off x="0" y="0"/>
-            <a:ext cx="12191695" cy="6858000"/>
+        </p:nvSpPr>
+        <p:spPr>
+          <a:xfrm>
+            <a:off x="8534186" y="0"/>
+            <a:ext cx="3657508" cy="6858000"/>
           </a:xfrm>
           <a:prstGeom prst="rect">
             <a:avLst/>
           </a:prstGeom>
-        </p:spPr>
-      </p:pic>
+          <a:solidFill>
+            <a:srgbClr val="7BB6EA"/>
+          </a:solidFill>
+          <a:ln>
+            <a:noFill/>
+          </a:ln>
+        </p:spPr>
+        <p:txBody>
+          <a:bodyPr rtlCol="0" anchor="ctr"/>
+          <a:lstStyle/>
+          <a:p>
+            <a:pPr algn="ctr"/>
+          </a:p>
+        </p:txBody>
+      </p:sp>
+      <p:sp>
+        <p:nvSpPr>
+          <p:cNvPr id="4" name="장식"/>
+          <p:cNvSpPr/>
+          <p:nvPr/>
+        </p:nvSpPr>
+        <p:spPr>
+          <a:xfrm>
+            <a:off x="7985546" y="2880360"/>
+            <a:ext cx="1097280" cy="1097280"/>
+          </a:xfrm>
+          <a:prstGeom prst="ellipse">
+            <a:avLst/>
+          </a:prstGeom>
+          <a:solidFill>
+            <a:srgbClr val="A5CFF3"/>
+          </a:solidFill>
+          <a:ln>
+            <a:noFill/>
+          </a:ln>
+        </p:spPr>
+        <p:txBody>
+          <a:bodyPr rtlCol="0" anchor="ctr"/>
+          <a:lstStyle/>
+          <a:p>
+            <a:pPr algn="ctr"/>
+          </a:p>
+        </p:txBody>
+      </p:sp>
+      <p:sp>
+        <p:nvSpPr>
+          <p:cNvPr id="5" name="라벨"/>
+          <p:cNvSpPr txBox="1"/>
+          <p:nvPr/>
+        </p:nvSpPr>
+        <p:spPr>
+          <a:xfrm>
+            <a:off x="822960" y="2148840"/>
+            <a:ext cx="6705432" cy="274320"/>
+          </a:xfrm>
+          <a:prstGeom prst="rect">
+            <a:avLst/>
+          </a:prstGeom>
+          <a:noFill/>
+        </p:spPr>
+        <p:txBody>
+          <a:bodyPr wrap="square" lIns="54864" rIns="54864" tIns="27432" bIns="27432" anchor="t">
+            <a:noAutofit/>
+          </a:bodyPr>
+          <a:lstStyle/>
+          <a:p>
+            <a:pPr algn="l">
+              <a:lnSpc>
+                <a:spcPct val="115000"/>
+              </a:lnSpc>
+            </a:pPr>
+            <a:r>
+              <a:rPr sz="1000" b="1" i="0" spc="250">
+                <a:solidFill>
+                  <a:srgbClr val="26231F"/>
+                </a:solidFill>
+              </a:rPr>
+              <a:t>PRESENTATION</a:t>
+            </a:r>
+          </a:p>
+        </p:txBody>
+      </p:sp>
       <p:sp>
         <p:nvSpPr>
           <p:cNvPr id="2" name="Title 1"/>
@@ -3329,8 +3409,8 @@
         </p:nvSpPr>
         <p:spPr>
           <a:xfrm>
-            <a:off x="853418" y="2057400"/>
-            <a:ext cx="6095847" cy="1554480"/>
+            <a:off x="822960" y="2606040"/>
+            <a:ext cx="6705432" cy="1188720"/>
           </a:xfrm>
         </p:spPr>
         <p:txBody>
@@ -3345,9 +3425,9 @@
               </a:lnSpc>
             </a:pPr>
             <a:r>
-              <a:rPr sz="3600" b="1" i="0">
+              <a:rPr sz="4000" b="1" i="0">
                 <a:solidFill>
-                  <a:srgbClr val="113B5F"/>
+                  <a:srgbClr val="26231F"/>
                 </a:solidFill>
               </a:rPr>
               <a:t>발표 제목을 입력하세요</a:t>
@@ -3357,14 +3437,14 @@
       </p:sp>
       <p:sp>
         <p:nvSpPr>
-          <p:cNvPr id="4" name="한 줄 문구"/>
+          <p:cNvPr id="6" name="한 줄 문구"/>
           <p:cNvSpPr txBox="1"/>
           <p:nvPr/>
         </p:nvSpPr>
         <p:spPr>
           <a:xfrm>
-            <a:off x="853418" y="3749039"/>
-            <a:ext cx="6095847" cy="822960"/>
+            <a:off x="822960" y="3886200"/>
+            <a:ext cx="6705432" cy="822960"/>
           </a:xfrm>
           <a:prstGeom prst="rect">
             <a:avLst/>
@@ -3383,9 +3463,9 @@
               </a:lnSpc>
             </a:pPr>
             <a:r>
-              <a:rPr sz="1700" b="0" i="1">
+              <a:rPr sz="1700" b="0" i="0">
                 <a:solidFill>
-                  <a:srgbClr val="113B5F"/>
+                  <a:srgbClr val="26231F"/>
                 </a:solidFill>
               </a:rPr>
               <a:t>더운 날이니 중간에 쉬는 시간을 두겠습니다</a:t>
@@ -3395,14 +3475,14 @@
       </p:sp>
       <p:sp>
         <p:nvSpPr>
-          <p:cNvPr id="5" name="안내 문구"/>
+          <p:cNvPr id="7" name="안내 문구"/>
           <p:cNvSpPr txBox="1"/>
           <p:nvPr/>
         </p:nvSpPr>
         <p:spPr>
           <a:xfrm>
-            <a:off x="853418" y="4617720"/>
-            <a:ext cx="6095847" cy="914400"/>
+            <a:off x="822960" y="4754880"/>
+            <a:ext cx="6705432" cy="914400"/>
           </a:xfrm>
           <a:prstGeom prst="rect">
             <a:avLst/>
@@ -3423,7 +3503,7 @@
             <a:r>
               <a:rPr sz="1400" b="0" i="0">
                 <a:solidFill>
-                  <a:srgbClr val="666666"/>
+                  <a:srgbClr val="26231F"/>
                 </a:solidFill>
               </a:rPr>
               <a:t>교육·강의 · 발표자 이름</a:t>
@@ -3438,10 +3518,10 @@
             <a:r>
               <a:rPr sz="1400" b="0" i="0">
                 <a:solidFill>
-                  <a:srgbClr val="666666"/>
+                  <a:srgbClr val="26231F"/>
                 </a:solidFill>
               </a:rPr>
-              <a:t>2027. 00. 00</a:t>
+              <a:t>날짜 입력</a:t>
             </a:r>
           </a:p>
         </p:txBody>
@@ -3460,7 +3540,7 @@
     <p:bg>
       <p:bgPr>
         <a:solidFill>
-          <a:srgbClr val="EEF5FC"/>
+          <a:srgbClr val="FFFFFF"/>
         </a:solidFill>
         <a:effectLst/>
       </p:bgPr>
@@ -3474,23 +3554,20 @@
       <p:grpSpPr/>
       <p:sp>
         <p:nvSpPr>
-          <p:cNvPr id="3" name="장식"/>
+          <p:cNvPr id="3" name="포인트"/>
           <p:cNvSpPr/>
           <p:nvPr/>
         </p:nvSpPr>
         <p:spPr>
-          <a:xfrm rot="10800000">
-            <a:off x="10637215" y="0"/>
-            <a:ext cx="914400" cy="1554480"/>
-          </a:xfrm>
-          <a:prstGeom prst="round2SameRect">
-            <a:avLst>
-              <a:gd name="adj1" fmla="val 50000"/>
-              <a:gd name="adj2" fmla="val 0"/>
-            </a:avLst>
+          <a:xfrm>
+            <a:off x="5958687" y="246888"/>
+            <a:ext cx="274320" cy="109728"/>
+          </a:xfrm>
+          <a:prstGeom prst="wave">
+            <a:avLst/>
           </a:prstGeom>
           <a:solidFill>
-            <a:srgbClr val="D1E7FA"/>
+            <a:srgbClr val="7BB6EA"/>
           </a:solidFill>
           <a:ln>
             <a:noFill/>
@@ -3501,6 +3578,73 @@
           <a:lstStyle/>
           <a:p>
             <a:pPr algn="ctr"/>
+          </a:p>
+        </p:txBody>
+      </p:sp>
+      <p:sp>
+        <p:nvSpPr>
+          <p:cNvPr id="4" name="장식"/>
+          <p:cNvSpPr/>
+          <p:nvPr/>
+        </p:nvSpPr>
+        <p:spPr>
+          <a:xfrm>
+            <a:off x="5684367" y="1572768"/>
+            <a:ext cx="822960" cy="22860"/>
+          </a:xfrm>
+          <a:prstGeom prst="rect">
+            <a:avLst/>
+          </a:prstGeom>
+          <a:solidFill>
+            <a:srgbClr val="7BB6EA"/>
+          </a:solidFill>
+          <a:ln>
+            <a:noFill/>
+          </a:ln>
+        </p:spPr>
+        <p:txBody>
+          <a:bodyPr rtlCol="0" anchor="ctr"/>
+          <a:lstStyle/>
+          <a:p>
+            <a:pPr algn="ctr"/>
+          </a:p>
+        </p:txBody>
+      </p:sp>
+      <p:sp>
+        <p:nvSpPr>
+          <p:cNvPr id="5" name="상단 라벨"/>
+          <p:cNvSpPr txBox="1"/>
+          <p:nvPr/>
+        </p:nvSpPr>
+        <p:spPr>
+          <a:xfrm>
+            <a:off x="640080" y="182880"/>
+            <a:ext cx="3657600" cy="274320"/>
+          </a:xfrm>
+          <a:prstGeom prst="rect">
+            <a:avLst/>
+          </a:prstGeom>
+          <a:noFill/>
+        </p:spPr>
+        <p:txBody>
+          <a:bodyPr wrap="square" lIns="54864" rIns="54864" tIns="27432" bIns="27432" anchor="ctr">
+            <a:noAutofit/>
+          </a:bodyPr>
+          <a:lstStyle/>
+          <a:p>
+            <a:pPr algn="l">
+              <a:lnSpc>
+                <a:spcPct val="115000"/>
+              </a:lnSpc>
+            </a:pPr>
+            <a:r>
+              <a:rPr sz="800" b="1" i="0" spc="250">
+                <a:solidFill>
+                  <a:srgbClr val="8E8780"/>
+                </a:solidFill>
+              </a:rPr>
+              <a:t>PRESENTATION</a:t>
+            </a:r>
           </a:p>
         </p:txBody>
       </p:sp>
@@ -3516,8 +3660,8 @@
         </p:nvSpPr>
         <p:spPr>
           <a:xfrm>
-            <a:off x="640080" y="457200"/>
-            <a:ext cx="9722815" cy="868680"/>
+            <a:off x="1371600" y="640080"/>
+            <a:ext cx="9448495" cy="868680"/>
           </a:xfrm>
         </p:spPr>
         <p:txBody>
@@ -3526,7 +3670,7 @@
           </a:bodyPr>
           <a:lstStyle/>
           <a:p>
-            <a:pPr algn="l">
+            <a:pPr algn="ctr">
               <a:lnSpc>
                 <a:spcPct val="105000"/>
               </a:lnSpc>
@@ -3534,7 +3678,7 @@
             <a:r>
               <a:rPr sz="3000" b="1" i="0">
                 <a:solidFill>
-                  <a:srgbClr val="113B5F"/>
+                  <a:srgbClr val="26231F"/>
                 </a:solidFill>
               </a:rPr>
               <a:t>목차</a:t>
@@ -3544,26 +3688,24 @@
       </p:sp>
       <p:sp>
         <p:nvSpPr>
-          <p:cNvPr id="4" name="줄 1"/>
+          <p:cNvPr id="6" name="줄 1"/>
           <p:cNvSpPr/>
           <p:nvPr/>
         </p:nvSpPr>
         <p:spPr>
           <a:xfrm>
-            <a:off x="640080" y="1600200"/>
+            <a:off x="640080" y="1783080"/>
             <a:ext cx="10911535" cy="914400"/>
           </a:xfrm>
           <a:prstGeom prst="roundRect">
             <a:avLst>
-              <a:gd name="adj" fmla="val 8000"/>
+              <a:gd name="adj" fmla="val 7000"/>
             </a:avLst>
           </a:prstGeom>
-          <a:solidFill>
-            <a:srgbClr val="EEF5FC"/>
-          </a:solidFill>
-          <a:ln w="12700">
+          <a:noFill/>
+          <a:ln w="15875">
             <a:solidFill>
-              <a:srgbClr val="D1E7FA"/>
+              <a:srgbClr val="7BB6EA"/>
             </a:solidFill>
           </a:ln>
         </p:spPr>
@@ -3577,57 +3719,14 @@
       </p:sp>
       <p:sp>
         <p:nvSpPr>
-          <p:cNvPr id="5" name="번호 1"/>
-          <p:cNvSpPr/>
-          <p:nvPr/>
-        </p:nvSpPr>
-        <p:spPr>
-          <a:xfrm>
-            <a:off x="822959" y="1828800"/>
-            <a:ext cx="457200" cy="457200"/>
-          </a:xfrm>
-          <a:prstGeom prst="ellipse">
-            <a:avLst/>
-          </a:prstGeom>
-          <a:solidFill>
-            <a:srgbClr val="267BC5"/>
-          </a:solidFill>
-          <a:ln>
-            <a:noFill/>
-          </a:ln>
-        </p:spPr>
-        <p:txBody>
-          <a:bodyPr rtlCol="0" anchor="ctr" wrap="square" lIns="54864" rIns="54864" tIns="27432" bIns="27432">
-            <a:noAutofit/>
-          </a:bodyPr>
-          <a:lstStyle/>
-          <a:p>
-            <a:pPr algn="ctr">
-              <a:lnSpc>
-                <a:spcPct val="100000"/>
-              </a:lnSpc>
-            </a:pPr>
-            <a:r>
-              <a:rPr sz="1600" b="1" i="0">
-                <a:solidFill>
-                  <a:srgbClr val="FFFFFF"/>
-                </a:solidFill>
-              </a:rPr>
-              <a:t>1</a:t>
-            </a:r>
-          </a:p>
-        </p:txBody>
-      </p:sp>
-      <p:sp>
-        <p:nvSpPr>
-          <p:cNvPr id="6" name="TextBox 5"/>
+          <p:cNvPr id="7" name="번호 1"/>
           <p:cNvSpPr txBox="1"/>
           <p:nvPr/>
         </p:nvSpPr>
         <p:spPr>
           <a:xfrm>
-            <a:off x="1508760" y="1645920"/>
-            <a:ext cx="2743200" cy="822960"/>
+            <a:off x="731519" y="1965960"/>
+            <a:ext cx="914400" cy="548640"/>
           </a:xfrm>
           <a:prstGeom prst="rect">
             <a:avLst/>
@@ -3646,26 +3745,26 @@
               </a:lnSpc>
             </a:pPr>
             <a:r>
-              <a:rPr sz="1800" b="1" i="0">
+              <a:rPr sz="2400" b="1" i="0">
                 <a:solidFill>
-                  <a:srgbClr val="113B5F"/>
+                  <a:srgbClr val="7BB6EA"/>
                 </a:solidFill>
               </a:rPr>
-              <a:t>오늘의 목표</a:t>
-            </a:r>
-          </a:p>
-        </p:txBody>
-      </p:sp>
-      <p:sp>
-        <p:nvSpPr>
-          <p:cNvPr id="7" name="TextBox 6"/>
+              <a:t>01</a:t>
+            </a:r>
+          </a:p>
+        </p:txBody>
+      </p:sp>
+      <p:sp>
+        <p:nvSpPr>
+          <p:cNvPr id="8" name="TextBox 7"/>
           <p:cNvSpPr txBox="1"/>
           <p:nvPr/>
         </p:nvSpPr>
         <p:spPr>
           <a:xfrm>
-            <a:off x="4297680" y="1645920"/>
-            <a:ext cx="7071055" cy="822960"/>
+            <a:off x="1508760" y="1828800"/>
+            <a:ext cx="2743200" cy="822960"/>
           </a:xfrm>
           <a:prstGeom prst="rect">
             <a:avLst/>
@@ -3684,102 +3783,26 @@
               </a:lnSpc>
             </a:pPr>
             <a:r>
-              <a:rPr sz="1500" b="0" i="0">
+              <a:rPr sz="1800" b="1" i="0">
                 <a:solidFill>
-                  <a:srgbClr val="2B2B2B"/>
+                  <a:srgbClr val="273949"/>
                 </a:solidFill>
               </a:rPr>
-              <a:t>한 줄로 내용을 적어 주세요</a:t>
-            </a:r>
-          </a:p>
-        </p:txBody>
-      </p:sp>
-      <p:sp>
-        <p:nvSpPr>
-          <p:cNvPr id="8" name="줄 2"/>
-          <p:cNvSpPr/>
-          <p:nvPr/>
-        </p:nvSpPr>
-        <p:spPr>
-          <a:xfrm>
-            <a:off x="640080" y="2651760"/>
-            <a:ext cx="10911535" cy="914400"/>
-          </a:xfrm>
-          <a:prstGeom prst="roundRect">
-            <a:avLst>
-              <a:gd name="adj" fmla="val 8000"/>
-            </a:avLst>
-          </a:prstGeom>
-          <a:solidFill>
-            <a:srgbClr val="EEF5FC"/>
-          </a:solidFill>
-          <a:ln w="12700">
-            <a:solidFill>
-              <a:srgbClr val="D1E7FA"/>
-            </a:solidFill>
-          </a:ln>
-        </p:spPr>
-        <p:txBody>
-          <a:bodyPr rtlCol="0" anchor="ctr"/>
-          <a:lstStyle/>
-          <a:p>
-            <a:pPr algn="ctr"/>
-          </a:p>
-        </p:txBody>
-      </p:sp>
-      <p:sp>
-        <p:nvSpPr>
-          <p:cNvPr id="9" name="번호 2"/>
-          <p:cNvSpPr/>
-          <p:nvPr/>
-        </p:nvSpPr>
-        <p:spPr>
-          <a:xfrm>
-            <a:off x="822959" y="2880360"/>
-            <a:ext cx="457200" cy="457200"/>
-          </a:xfrm>
-          <a:prstGeom prst="ellipse">
-            <a:avLst/>
-          </a:prstGeom>
-          <a:solidFill>
-            <a:srgbClr val="267BC5"/>
-          </a:solidFill>
-          <a:ln>
-            <a:noFill/>
-          </a:ln>
-        </p:spPr>
-        <p:txBody>
-          <a:bodyPr rtlCol="0" anchor="ctr" wrap="square" lIns="54864" rIns="54864" tIns="27432" bIns="27432">
-            <a:noAutofit/>
-          </a:bodyPr>
-          <a:lstStyle/>
-          <a:p>
-            <a:pPr algn="ctr">
-              <a:lnSpc>
-                <a:spcPct val="100000"/>
-              </a:lnSpc>
-            </a:pPr>
-            <a:r>
-              <a:rPr sz="1600" b="1" i="0">
-                <a:solidFill>
-                  <a:srgbClr val="FFFFFF"/>
-                </a:solidFill>
-              </a:rPr>
-              <a:t>2</a:t>
-            </a:r>
-          </a:p>
-        </p:txBody>
-      </p:sp>
-      <p:sp>
-        <p:nvSpPr>
-          <p:cNvPr id="10" name="TextBox 9"/>
+              <a:t>오늘의 목표</a:t>
+            </a:r>
+          </a:p>
+        </p:txBody>
+      </p:sp>
+      <p:sp>
+        <p:nvSpPr>
+          <p:cNvPr id="9" name="TextBox 8"/>
           <p:cNvSpPr txBox="1"/>
           <p:nvPr/>
         </p:nvSpPr>
         <p:spPr>
           <a:xfrm>
-            <a:off x="1508760" y="2697479"/>
-            <a:ext cx="2743200" cy="822960"/>
+            <a:off x="4297680" y="1828800"/>
+            <a:ext cx="7071055" cy="822960"/>
           </a:xfrm>
           <a:prstGeom prst="rect">
             <a:avLst/>
@@ -3798,26 +3821,57 @@
               </a:lnSpc>
             </a:pPr>
             <a:r>
-              <a:rPr sz="1800" b="1" i="0">
+              <a:rPr sz="1500" b="0" i="0">
                 <a:solidFill>
-                  <a:srgbClr val="113B5F"/>
+                  <a:srgbClr val="26231F"/>
                 </a:solidFill>
               </a:rPr>
-              <a:t>핵심 개념</a:t>
-            </a:r>
-          </a:p>
-        </p:txBody>
-      </p:sp>
-      <p:sp>
-        <p:nvSpPr>
-          <p:cNvPr id="11" name="TextBox 10"/>
+              <a:t>한 줄로 내용을 적어 주세요</a:t>
+            </a:r>
+          </a:p>
+        </p:txBody>
+      </p:sp>
+      <p:sp>
+        <p:nvSpPr>
+          <p:cNvPr id="10" name="줄 2"/>
+          <p:cNvSpPr/>
+          <p:nvPr/>
+        </p:nvSpPr>
+        <p:spPr>
+          <a:xfrm>
+            <a:off x="640080" y="2834639"/>
+            <a:ext cx="10911535" cy="914400"/>
+          </a:xfrm>
+          <a:prstGeom prst="roundRect">
+            <a:avLst>
+              <a:gd name="adj" fmla="val 7000"/>
+            </a:avLst>
+          </a:prstGeom>
+          <a:noFill/>
+          <a:ln w="15875">
+            <a:solidFill>
+              <a:srgbClr val="7BB6EA"/>
+            </a:solidFill>
+          </a:ln>
+        </p:spPr>
+        <p:txBody>
+          <a:bodyPr rtlCol="0" anchor="ctr"/>
+          <a:lstStyle/>
+          <a:p>
+            <a:pPr algn="ctr"/>
+          </a:p>
+        </p:txBody>
+      </p:sp>
+      <p:sp>
+        <p:nvSpPr>
+          <p:cNvPr id="11" name="번호 2"/>
           <p:cNvSpPr txBox="1"/>
           <p:nvPr/>
         </p:nvSpPr>
         <p:spPr>
           <a:xfrm>
-            <a:off x="4297680" y="2697479"/>
-            <a:ext cx="7071055" cy="822960"/>
+            <a:off x="731519" y="3017520"/>
+            <a:ext cx="914400" cy="548640"/>
           </a:xfrm>
           <a:prstGeom prst="rect">
             <a:avLst/>
@@ -3836,101 +3890,25 @@
               </a:lnSpc>
             </a:pPr>
             <a:r>
-              <a:rPr sz="1500" b="0" i="0">
+              <a:rPr sz="2400" b="1" i="0">
                 <a:solidFill>
-                  <a:srgbClr val="2B2B2B"/>
+                  <a:srgbClr val="7BB6EA"/>
                 </a:solidFill>
               </a:rPr>
-              <a:t>한 줄로 내용을 적어 주세요</a:t>
-            </a:r>
-          </a:p>
-        </p:txBody>
-      </p:sp>
-      <p:sp>
-        <p:nvSpPr>
-          <p:cNvPr id="12" name="줄 3"/>
-          <p:cNvSpPr/>
-          <p:nvPr/>
-        </p:nvSpPr>
-        <p:spPr>
-          <a:xfrm>
-            <a:off x="640080" y="3703320"/>
-            <a:ext cx="10911535" cy="914400"/>
-          </a:xfrm>
-          <a:prstGeom prst="roundRect">
-            <a:avLst>
-              <a:gd name="adj" fmla="val 8000"/>
-            </a:avLst>
-          </a:prstGeom>
-          <a:solidFill>
-            <a:srgbClr val="EEF5FC"/>
-          </a:solidFill>
-          <a:ln w="12700">
-            <a:solidFill>
-              <a:srgbClr val="D1E7FA"/>
-            </a:solidFill>
-          </a:ln>
-        </p:spPr>
-        <p:txBody>
-          <a:bodyPr rtlCol="0" anchor="ctr"/>
-          <a:lstStyle/>
-          <a:p>
-            <a:pPr algn="ctr"/>
-          </a:p>
-        </p:txBody>
-      </p:sp>
-      <p:sp>
-        <p:nvSpPr>
-          <p:cNvPr id="13" name="번호 3"/>
-          <p:cNvSpPr/>
-          <p:nvPr/>
-        </p:nvSpPr>
-        <p:spPr>
-          <a:xfrm>
-            <a:off x="822959" y="3931920"/>
-            <a:ext cx="457200" cy="457200"/>
-          </a:xfrm>
-          <a:prstGeom prst="ellipse">
-            <a:avLst/>
-          </a:prstGeom>
-          <a:solidFill>
-            <a:srgbClr val="267BC5"/>
-          </a:solidFill>
-          <a:ln>
-            <a:noFill/>
-          </a:ln>
-        </p:spPr>
-        <p:txBody>
-          <a:bodyPr rtlCol="0" anchor="ctr" wrap="square" lIns="54864" rIns="54864" tIns="27432" bIns="27432">
-            <a:noAutofit/>
-          </a:bodyPr>
-          <a:lstStyle/>
-          <a:p>
-            <a:pPr algn="ctr">
-              <a:lnSpc>
-                <a:spcPct val="100000"/>
-              </a:lnSpc>
-            </a:pPr>
-            <a:r>
-              <a:rPr sz="1600" b="1" i="0">
-                <a:solidFill>
-                  <a:srgbClr val="FFFFFF"/>
-                </a:solidFill>
-              </a:rPr>
-              <a:t>3</a:t>
-            </a:r>
-          </a:p>
-        </p:txBody>
-      </p:sp>
-      <p:sp>
-        <p:nvSpPr>
-          <p:cNvPr id="14" name="TextBox 13"/>
+              <a:t>02</a:t>
+            </a:r>
+          </a:p>
+        </p:txBody>
+      </p:sp>
+      <p:sp>
+        <p:nvSpPr>
+          <p:cNvPr id="12" name="TextBox 11"/>
           <p:cNvSpPr txBox="1"/>
           <p:nvPr/>
         </p:nvSpPr>
         <p:spPr>
           <a:xfrm>
-            <a:off x="1508760" y="3749039"/>
+            <a:off x="1508760" y="2880359"/>
             <a:ext cx="2743200" cy="822960"/>
           </a:xfrm>
           <a:prstGeom prst="rect">
@@ -3952,23 +3930,23 @@
             <a:r>
               <a:rPr sz="1800" b="1" i="0">
                 <a:solidFill>
-                  <a:srgbClr val="113B5F"/>
+                  <a:srgbClr val="273949"/>
                 </a:solidFill>
               </a:rPr>
-              <a:t>실습과 예시</a:t>
-            </a:r>
-          </a:p>
-        </p:txBody>
-      </p:sp>
-      <p:sp>
-        <p:nvSpPr>
-          <p:cNvPr id="15" name="TextBox 14"/>
+              <a:t>핵심 개념</a:t>
+            </a:r>
+          </a:p>
+        </p:txBody>
+      </p:sp>
+      <p:sp>
+        <p:nvSpPr>
+          <p:cNvPr id="13" name="TextBox 12"/>
           <p:cNvSpPr txBox="1"/>
           <p:nvPr/>
         </p:nvSpPr>
         <p:spPr>
           <a:xfrm>
-            <a:off x="4297680" y="3749039"/>
+            <a:off x="4297680" y="2880359"/>
             <a:ext cx="7071055" cy="822960"/>
           </a:xfrm>
           <a:prstGeom prst="rect">
@@ -3990,7 +3968,7 @@
             <a:r>
               <a:rPr sz="1500" b="0" i="0">
                 <a:solidFill>
-                  <a:srgbClr val="2B2B2B"/>
+                  <a:srgbClr val="26231F"/>
                 </a:solidFill>
               </a:rPr>
               <a:t>한 줄로 내용을 적어 주세요</a:t>
@@ -4000,26 +3978,24 @@
       </p:sp>
       <p:sp>
         <p:nvSpPr>
-          <p:cNvPr id="16" name="줄 4"/>
+          <p:cNvPr id="14" name="줄 3"/>
           <p:cNvSpPr/>
           <p:nvPr/>
         </p:nvSpPr>
         <p:spPr>
           <a:xfrm>
-            <a:off x="640080" y="4754879"/>
+            <a:off x="640080" y="3886200"/>
             <a:ext cx="10911535" cy="914400"/>
           </a:xfrm>
           <a:prstGeom prst="roundRect">
             <a:avLst>
-              <a:gd name="adj" fmla="val 8000"/>
+              <a:gd name="adj" fmla="val 7000"/>
             </a:avLst>
           </a:prstGeom>
-          <a:solidFill>
-            <a:srgbClr val="EEF5FC"/>
-          </a:solidFill>
-          <a:ln w="12700">
+          <a:noFill/>
+          <a:ln w="15875">
             <a:solidFill>
-              <a:srgbClr val="D1E7FA"/>
+              <a:srgbClr val="7BB6EA"/>
             </a:solidFill>
           </a:ln>
         </p:spPr>
@@ -4033,57 +4009,14 @@
       </p:sp>
       <p:sp>
         <p:nvSpPr>
-          <p:cNvPr id="17" name="번호 4"/>
-          <p:cNvSpPr/>
-          <p:nvPr/>
-        </p:nvSpPr>
-        <p:spPr>
-          <a:xfrm>
-            <a:off x="822959" y="4983479"/>
-            <a:ext cx="457200" cy="457200"/>
-          </a:xfrm>
-          <a:prstGeom prst="ellipse">
-            <a:avLst/>
-          </a:prstGeom>
-          <a:solidFill>
-            <a:srgbClr val="267BC5"/>
-          </a:solidFill>
-          <a:ln>
-            <a:noFill/>
-          </a:ln>
-        </p:spPr>
-        <p:txBody>
-          <a:bodyPr rtlCol="0" anchor="ctr" wrap="square" lIns="54864" rIns="54864" tIns="27432" bIns="27432">
-            <a:noAutofit/>
-          </a:bodyPr>
-          <a:lstStyle/>
-          <a:p>
-            <a:pPr algn="ctr">
-              <a:lnSpc>
-                <a:spcPct val="100000"/>
-              </a:lnSpc>
-            </a:pPr>
-            <a:r>
-              <a:rPr sz="1600" b="1" i="0">
-                <a:solidFill>
-                  <a:srgbClr val="FFFFFF"/>
-                </a:solidFill>
-              </a:rPr>
-              <a:t>4</a:t>
-            </a:r>
-          </a:p>
-        </p:txBody>
-      </p:sp>
-      <p:sp>
-        <p:nvSpPr>
-          <p:cNvPr id="18" name="TextBox 17"/>
+          <p:cNvPr id="15" name="번호 3"/>
           <p:cNvSpPr txBox="1"/>
           <p:nvPr/>
         </p:nvSpPr>
         <p:spPr>
           <a:xfrm>
-            <a:off x="1508760" y="4800599"/>
-            <a:ext cx="2743200" cy="822960"/>
+            <a:off x="731519" y="4069080"/>
+            <a:ext cx="914400" cy="548640"/>
           </a:xfrm>
           <a:prstGeom prst="rect">
             <a:avLst/>
@@ -4102,26 +4035,26 @@
               </a:lnSpc>
             </a:pPr>
             <a:r>
-              <a:rPr sz="1800" b="1" i="0">
+              <a:rPr sz="2400" b="1" i="0">
                 <a:solidFill>
-                  <a:srgbClr val="113B5F"/>
+                  <a:srgbClr val="7BB6EA"/>
                 </a:solidFill>
               </a:rPr>
-              <a:t>정리와 질문</a:t>
-            </a:r>
-          </a:p>
-        </p:txBody>
-      </p:sp>
-      <p:sp>
-        <p:nvSpPr>
-          <p:cNvPr id="19" name="TextBox 18"/>
+              <a:t>03</a:t>
+            </a:r>
+          </a:p>
+        </p:txBody>
+      </p:sp>
+      <p:sp>
+        <p:nvSpPr>
+          <p:cNvPr id="16" name="TextBox 15"/>
           <p:cNvSpPr txBox="1"/>
           <p:nvPr/>
         </p:nvSpPr>
         <p:spPr>
           <a:xfrm>
-            <a:off x="4297680" y="4800599"/>
-            <a:ext cx="7071055" cy="822960"/>
+            <a:off x="1508760" y="3931920"/>
+            <a:ext cx="2743200" cy="822960"/>
           </a:xfrm>
           <a:prstGeom prst="rect">
             <a:avLst/>
@@ -4140,9 +4073,192 @@
               </a:lnSpc>
             </a:pPr>
             <a:r>
+              <a:rPr sz="1800" b="1" i="0">
+                <a:solidFill>
+                  <a:srgbClr val="273949"/>
+                </a:solidFill>
+              </a:rPr>
+              <a:t>실습과 예시</a:t>
+            </a:r>
+          </a:p>
+        </p:txBody>
+      </p:sp>
+      <p:sp>
+        <p:nvSpPr>
+          <p:cNvPr id="17" name="TextBox 16"/>
+          <p:cNvSpPr txBox="1"/>
+          <p:nvPr/>
+        </p:nvSpPr>
+        <p:spPr>
+          <a:xfrm>
+            <a:off x="4297680" y="3931920"/>
+            <a:ext cx="7071055" cy="822960"/>
+          </a:xfrm>
+          <a:prstGeom prst="rect">
+            <a:avLst/>
+          </a:prstGeom>
+          <a:noFill/>
+        </p:spPr>
+        <p:txBody>
+          <a:bodyPr wrap="square" lIns="54864" rIns="54864" tIns="27432" bIns="27432" anchor="ctr">
+            <a:noAutofit/>
+          </a:bodyPr>
+          <a:lstStyle/>
+          <a:p>
+            <a:pPr algn="l">
+              <a:lnSpc>
+                <a:spcPct val="115000"/>
+              </a:lnSpc>
+            </a:pPr>
+            <a:r>
               <a:rPr sz="1500" b="0" i="0">
                 <a:solidFill>
-                  <a:srgbClr val="2B2B2B"/>
+                  <a:srgbClr val="26231F"/>
+                </a:solidFill>
+              </a:rPr>
+              <a:t>한 줄로 내용을 적어 주세요</a:t>
+            </a:r>
+          </a:p>
+        </p:txBody>
+      </p:sp>
+      <p:sp>
+        <p:nvSpPr>
+          <p:cNvPr id="18" name="줄 4"/>
+          <p:cNvSpPr/>
+          <p:nvPr/>
+        </p:nvSpPr>
+        <p:spPr>
+          <a:xfrm>
+            <a:off x="640080" y="4937759"/>
+            <a:ext cx="10911535" cy="914400"/>
+          </a:xfrm>
+          <a:prstGeom prst="roundRect">
+            <a:avLst>
+              <a:gd name="adj" fmla="val 7000"/>
+            </a:avLst>
+          </a:prstGeom>
+          <a:noFill/>
+          <a:ln w="15875">
+            <a:solidFill>
+              <a:srgbClr val="7BB6EA"/>
+            </a:solidFill>
+          </a:ln>
+        </p:spPr>
+        <p:txBody>
+          <a:bodyPr rtlCol="0" anchor="ctr"/>
+          <a:lstStyle/>
+          <a:p>
+            <a:pPr algn="ctr"/>
+          </a:p>
+        </p:txBody>
+      </p:sp>
+      <p:sp>
+        <p:nvSpPr>
+          <p:cNvPr id="19" name="번호 4"/>
+          <p:cNvSpPr txBox="1"/>
+          <p:nvPr/>
+        </p:nvSpPr>
+        <p:spPr>
+          <a:xfrm>
+            <a:off x="731519" y="5120640"/>
+            <a:ext cx="914400" cy="548640"/>
+          </a:xfrm>
+          <a:prstGeom prst="rect">
+            <a:avLst/>
+          </a:prstGeom>
+          <a:noFill/>
+        </p:spPr>
+        <p:txBody>
+          <a:bodyPr wrap="square" lIns="54864" rIns="54864" tIns="27432" bIns="27432" anchor="ctr">
+            <a:noAutofit/>
+          </a:bodyPr>
+          <a:lstStyle/>
+          <a:p>
+            <a:pPr algn="l">
+              <a:lnSpc>
+                <a:spcPct val="115000"/>
+              </a:lnSpc>
+            </a:pPr>
+            <a:r>
+              <a:rPr sz="2400" b="1" i="0">
+                <a:solidFill>
+                  <a:srgbClr val="7BB6EA"/>
+                </a:solidFill>
+              </a:rPr>
+              <a:t>04</a:t>
+            </a:r>
+          </a:p>
+        </p:txBody>
+      </p:sp>
+      <p:sp>
+        <p:nvSpPr>
+          <p:cNvPr id="20" name="TextBox 19"/>
+          <p:cNvSpPr txBox="1"/>
+          <p:nvPr/>
+        </p:nvSpPr>
+        <p:spPr>
+          <a:xfrm>
+            <a:off x="1508760" y="4983479"/>
+            <a:ext cx="2743200" cy="822960"/>
+          </a:xfrm>
+          <a:prstGeom prst="rect">
+            <a:avLst/>
+          </a:prstGeom>
+          <a:noFill/>
+        </p:spPr>
+        <p:txBody>
+          <a:bodyPr wrap="square" lIns="54864" rIns="54864" tIns="27432" bIns="27432" anchor="ctr">
+            <a:noAutofit/>
+          </a:bodyPr>
+          <a:lstStyle/>
+          <a:p>
+            <a:pPr algn="l">
+              <a:lnSpc>
+                <a:spcPct val="115000"/>
+              </a:lnSpc>
+            </a:pPr>
+            <a:r>
+              <a:rPr sz="1800" b="1" i="0">
+                <a:solidFill>
+                  <a:srgbClr val="273949"/>
+                </a:solidFill>
+              </a:rPr>
+              <a:t>정리와 질문</a:t>
+            </a:r>
+          </a:p>
+        </p:txBody>
+      </p:sp>
+      <p:sp>
+        <p:nvSpPr>
+          <p:cNvPr id="21" name="TextBox 20"/>
+          <p:cNvSpPr txBox="1"/>
+          <p:nvPr/>
+        </p:nvSpPr>
+        <p:spPr>
+          <a:xfrm>
+            <a:off x="4297680" y="4983479"/>
+            <a:ext cx="7071055" cy="822960"/>
+          </a:xfrm>
+          <a:prstGeom prst="rect">
+            <a:avLst/>
+          </a:prstGeom>
+          <a:noFill/>
+        </p:spPr>
+        <p:txBody>
+          <a:bodyPr wrap="square" lIns="54864" rIns="54864" tIns="27432" bIns="27432" anchor="ctr">
+            <a:noAutofit/>
+          </a:bodyPr>
+          <a:lstStyle/>
+          <a:p>
+            <a:pPr algn="l">
+              <a:lnSpc>
+                <a:spcPct val="115000"/>
+              </a:lnSpc>
+            </a:pPr>
+            <a:r>
+              <a:rPr sz="1500" b="0" i="0">
+                <a:solidFill>
+                  <a:srgbClr val="26231F"/>
                 </a:solidFill>
               </a:rPr>
               <a:t>한 줄로 내용을 적어 주세요</a:t>
@@ -4164,7 +4280,7 @@
     <p:bg>
       <p:bgPr>
         <a:solidFill>
-          <a:srgbClr val="EEF5FC"/>
+          <a:srgbClr val="FFFFFF"/>
         </a:solidFill>
         <a:effectLst/>
       </p:bgPr>
@@ -4178,23 +4294,20 @@
       <p:grpSpPr/>
       <p:sp>
         <p:nvSpPr>
-          <p:cNvPr id="3" name="장식"/>
+          <p:cNvPr id="3" name="포인트"/>
           <p:cNvSpPr/>
           <p:nvPr/>
         </p:nvSpPr>
         <p:spPr>
-          <a:xfrm rot="10800000">
-            <a:off x="10637215" y="0"/>
-            <a:ext cx="914400" cy="1554480"/>
-          </a:xfrm>
-          <a:prstGeom prst="round2SameRect">
-            <a:avLst>
-              <a:gd name="adj1" fmla="val 50000"/>
-              <a:gd name="adj2" fmla="val 0"/>
-            </a:avLst>
+          <a:xfrm>
+            <a:off x="5958687" y="246888"/>
+            <a:ext cx="274320" cy="109728"/>
+          </a:xfrm>
+          <a:prstGeom prst="wave">
+            <a:avLst/>
           </a:prstGeom>
           <a:solidFill>
-            <a:srgbClr val="D1E7FA"/>
+            <a:srgbClr val="7BB6EA"/>
           </a:solidFill>
           <a:ln>
             <a:noFill/>
@@ -4205,6 +4318,73 @@
           <a:lstStyle/>
           <a:p>
             <a:pPr algn="ctr"/>
+          </a:p>
+        </p:txBody>
+      </p:sp>
+      <p:sp>
+        <p:nvSpPr>
+          <p:cNvPr id="4" name="장식"/>
+          <p:cNvSpPr/>
+          <p:nvPr/>
+        </p:nvSpPr>
+        <p:spPr>
+          <a:xfrm>
+            <a:off x="5684367" y="1572768"/>
+            <a:ext cx="822960" cy="22860"/>
+          </a:xfrm>
+          <a:prstGeom prst="rect">
+            <a:avLst/>
+          </a:prstGeom>
+          <a:solidFill>
+            <a:srgbClr val="7BB6EA"/>
+          </a:solidFill>
+          <a:ln>
+            <a:noFill/>
+          </a:ln>
+        </p:spPr>
+        <p:txBody>
+          <a:bodyPr rtlCol="0" anchor="ctr"/>
+          <a:lstStyle/>
+          <a:p>
+            <a:pPr algn="ctr"/>
+          </a:p>
+        </p:txBody>
+      </p:sp>
+      <p:sp>
+        <p:nvSpPr>
+          <p:cNvPr id="5" name="상단 라벨"/>
+          <p:cNvSpPr txBox="1"/>
+          <p:nvPr/>
+        </p:nvSpPr>
+        <p:spPr>
+          <a:xfrm>
+            <a:off x="640080" y="182880"/>
+            <a:ext cx="3657600" cy="274320"/>
+          </a:xfrm>
+          <a:prstGeom prst="rect">
+            <a:avLst/>
+          </a:prstGeom>
+          <a:noFill/>
+        </p:spPr>
+        <p:txBody>
+          <a:bodyPr wrap="square" lIns="54864" rIns="54864" tIns="27432" bIns="27432" anchor="ctr">
+            <a:noAutofit/>
+          </a:bodyPr>
+          <a:lstStyle/>
+          <a:p>
+            <a:pPr algn="l">
+              <a:lnSpc>
+                <a:spcPct val="115000"/>
+              </a:lnSpc>
+            </a:pPr>
+            <a:r>
+              <a:rPr sz="800" b="1" i="0" spc="250">
+                <a:solidFill>
+                  <a:srgbClr val="8E8780"/>
+                </a:solidFill>
+              </a:rPr>
+              <a:t>PRESENTATION</a:t>
+            </a:r>
           </a:p>
         </p:txBody>
       </p:sp>
@@ -4220,8 +4400,8 @@
         </p:nvSpPr>
         <p:spPr>
           <a:xfrm>
-            <a:off x="640080" y="457200"/>
-            <a:ext cx="9722815" cy="868680"/>
+            <a:off x="1371600" y="640080"/>
+            <a:ext cx="9448495" cy="868680"/>
           </a:xfrm>
         </p:spPr>
         <p:txBody>
@@ -4230,7 +4410,7 @@
           </a:bodyPr>
           <a:lstStyle/>
           <a:p>
-            <a:pPr algn="l">
+            <a:pPr algn="ctr">
               <a:lnSpc>
                 <a:spcPct val="105000"/>
               </a:lnSpc>
@@ -4238,7 +4418,7 @@
             <a:r>
               <a:rPr sz="3000" b="1" i="0">
                 <a:solidFill>
-                  <a:srgbClr val="113B5F"/>
+                  <a:srgbClr val="26231F"/>
                 </a:solidFill>
               </a:rPr>
               <a:t>핵심 메시지</a:t>
@@ -4248,13 +4428,13 @@
       </p:sp>
       <p:sp>
         <p:nvSpPr>
-          <p:cNvPr id="4" name="핵심 문장"/>
+          <p:cNvPr id="6" name="핵심 문장"/>
           <p:cNvSpPr txBox="1"/>
           <p:nvPr/>
         </p:nvSpPr>
         <p:spPr>
           <a:xfrm>
-            <a:off x="640080" y="1600200"/>
+            <a:off x="640080" y="1783080"/>
             <a:ext cx="10911535" cy="1188720"/>
           </a:xfrm>
           <a:prstGeom prst="rect">
@@ -4276,7 +4456,7 @@
             <a:r>
               <a:rPr sz="2600" b="1" i="0">
                 <a:solidFill>
-                  <a:srgbClr val="113B5F"/>
+                  <a:srgbClr val="273949"/>
                 </a:solidFill>
               </a:rPr>
               <a:t>한 문장으로 말하면 — 여기에 핵심 메시지를 입력하세요</a:t>
@@ -4286,26 +4466,24 @@
       </p:sp>
       <p:sp>
         <p:nvSpPr>
-          <p:cNvPr id="5" name="카드 1"/>
+          <p:cNvPr id="7" name="카드 1"/>
           <p:cNvSpPr/>
           <p:nvPr/>
         </p:nvSpPr>
         <p:spPr>
           <a:xfrm>
-            <a:off x="640080" y="3063240"/>
+            <a:off x="640080" y="3246120"/>
             <a:ext cx="3484778" cy="3017520"/>
           </a:xfrm>
           <a:prstGeom prst="roundRect">
             <a:avLst>
-              <a:gd name="adj" fmla="val 8000"/>
+              <a:gd name="adj" fmla="val 7000"/>
             </a:avLst>
           </a:prstGeom>
-          <a:solidFill>
-            <a:srgbClr val="EEF5FC"/>
-          </a:solidFill>
+          <a:noFill/>
           <a:ln w="15875">
             <a:solidFill>
-              <a:srgbClr val="D1E7FA"/>
+              <a:srgbClr val="7BB6EA"/>
             </a:solidFill>
           </a:ln>
         </p:spPr>
@@ -4319,57 +4497,14 @@
       </p:sp>
       <p:sp>
         <p:nvSpPr>
-          <p:cNvPr id="6" name="번호 1"/>
-          <p:cNvSpPr/>
-          <p:nvPr/>
-        </p:nvSpPr>
-        <p:spPr>
-          <a:xfrm>
-            <a:off x="822959" y="3246120"/>
-            <a:ext cx="457200" cy="457200"/>
-          </a:xfrm>
-          <a:prstGeom prst="ellipse">
-            <a:avLst/>
-          </a:prstGeom>
-          <a:solidFill>
-            <a:srgbClr val="267BC5"/>
-          </a:solidFill>
-          <a:ln>
-            <a:noFill/>
-          </a:ln>
-        </p:spPr>
-        <p:txBody>
-          <a:bodyPr rtlCol="0" anchor="ctr" wrap="square" lIns="54864" rIns="54864" tIns="27432" bIns="27432">
-            <a:noAutofit/>
-          </a:bodyPr>
-          <a:lstStyle/>
-          <a:p>
-            <a:pPr algn="ctr">
-              <a:lnSpc>
-                <a:spcPct val="100000"/>
-              </a:lnSpc>
-            </a:pPr>
-            <a:r>
-              <a:rPr sz="1600" b="1" i="0">
-                <a:solidFill>
-                  <a:srgbClr val="FFFFFF"/>
-                </a:solidFill>
-              </a:rPr>
-              <a:t>1</a:t>
-            </a:r>
-          </a:p>
-        </p:txBody>
-      </p:sp>
-      <p:sp>
-        <p:nvSpPr>
-          <p:cNvPr id="7" name="TextBox 6"/>
+          <p:cNvPr id="8" name="번호 1"/>
           <p:cNvSpPr txBox="1"/>
           <p:nvPr/>
         </p:nvSpPr>
         <p:spPr>
           <a:xfrm>
-            <a:off x="777240" y="3840480"/>
-            <a:ext cx="3210458" cy="640080"/>
+            <a:off x="731519" y="3383280"/>
+            <a:ext cx="914400" cy="548640"/>
           </a:xfrm>
           <a:prstGeom prst="rect">
             <a:avLst/>
@@ -4388,9 +4523,47 @@
               </a:lnSpc>
             </a:pPr>
             <a:r>
+              <a:rPr sz="2400" b="1" i="0">
+                <a:solidFill>
+                  <a:srgbClr val="7BB6EA"/>
+                </a:solidFill>
+              </a:rPr>
+              <a:t>01</a:t>
+            </a:r>
+          </a:p>
+        </p:txBody>
+      </p:sp>
+      <p:sp>
+        <p:nvSpPr>
+          <p:cNvPr id="9" name="TextBox 8"/>
+          <p:cNvSpPr txBox="1"/>
+          <p:nvPr/>
+        </p:nvSpPr>
+        <p:spPr>
+          <a:xfrm>
+            <a:off x="777240" y="4023360"/>
+            <a:ext cx="3210458" cy="640080"/>
+          </a:xfrm>
+          <a:prstGeom prst="rect">
+            <a:avLst/>
+          </a:prstGeom>
+          <a:noFill/>
+        </p:spPr>
+        <p:txBody>
+          <a:bodyPr wrap="square" lIns="54864" rIns="54864" tIns="27432" bIns="27432" anchor="ctr">
+            <a:noAutofit/>
+          </a:bodyPr>
+          <a:lstStyle/>
+          <a:p>
+            <a:pPr algn="l">
+              <a:lnSpc>
+                <a:spcPct val="115000"/>
+              </a:lnSpc>
+            </a:pPr>
+            <a:r>
               <a:rPr sz="1800" b="1" i="0">
                 <a:solidFill>
-                  <a:srgbClr val="113B5F"/>
+                  <a:srgbClr val="273949"/>
                 </a:solidFill>
               </a:rPr>
               <a:t>알아야 할 것</a:t>
@@ -4400,13 +4573,13 @@
       </p:sp>
       <p:sp>
         <p:nvSpPr>
-          <p:cNvPr id="8" name="TextBox 7"/>
+          <p:cNvPr id="10" name="TextBox 9"/>
           <p:cNvSpPr txBox="1"/>
           <p:nvPr/>
         </p:nvSpPr>
         <p:spPr>
           <a:xfrm>
-            <a:off x="777240" y="4526280"/>
+            <a:off x="777240" y="4709160"/>
             <a:ext cx="3210458" cy="1417319"/>
           </a:xfrm>
           <a:prstGeom prst="rect">
@@ -4428,7 +4601,7 @@
             <a:r>
               <a:rPr sz="1600" b="0" i="0">
                 <a:solidFill>
-                  <a:srgbClr val="2B2B2B"/>
+                  <a:srgbClr val="26231F"/>
                 </a:solidFill>
               </a:rPr>
               <a:t>내용을 입력하세요</a:t>
@@ -4443,7 +4616,7 @@
             <a:r>
               <a:rPr sz="1600" b="0" i="0">
                 <a:solidFill>
-                  <a:srgbClr val="2B2B2B"/>
+                  <a:srgbClr val="26231F"/>
                 </a:solidFill>
               </a:rPr>
               <a:t>내용을 입력하세요</a:t>
@@ -4453,26 +4626,24 @@
       </p:sp>
       <p:sp>
         <p:nvSpPr>
-          <p:cNvPr id="9" name="카드 2"/>
+          <p:cNvPr id="11" name="카드 2"/>
           <p:cNvSpPr/>
           <p:nvPr/>
         </p:nvSpPr>
         <p:spPr>
           <a:xfrm>
-            <a:off x="4353458" y="3063240"/>
+            <a:off x="4353458" y="3246120"/>
             <a:ext cx="3484778" cy="3017520"/>
           </a:xfrm>
           <a:prstGeom prst="roundRect">
             <a:avLst>
-              <a:gd name="adj" fmla="val 8000"/>
+              <a:gd name="adj" fmla="val 7000"/>
             </a:avLst>
           </a:prstGeom>
-          <a:solidFill>
-            <a:srgbClr val="EEF5FC"/>
-          </a:solidFill>
+          <a:noFill/>
           <a:ln w="15875">
             <a:solidFill>
-              <a:srgbClr val="D1E7FA"/>
+              <a:srgbClr val="7BB6EA"/>
             </a:solidFill>
           </a:ln>
         </p:spPr>
@@ -4486,57 +4657,14 @@
       </p:sp>
       <p:sp>
         <p:nvSpPr>
-          <p:cNvPr id="10" name="번호 2"/>
-          <p:cNvSpPr/>
-          <p:nvPr/>
-        </p:nvSpPr>
-        <p:spPr>
-          <a:xfrm>
-            <a:off x="4536338" y="3246120"/>
-            <a:ext cx="457200" cy="457200"/>
-          </a:xfrm>
-          <a:prstGeom prst="ellipse">
-            <a:avLst/>
-          </a:prstGeom>
-          <a:solidFill>
-            <a:srgbClr val="267BC5"/>
-          </a:solidFill>
-          <a:ln>
-            <a:noFill/>
-          </a:ln>
-        </p:spPr>
-        <p:txBody>
-          <a:bodyPr rtlCol="0" anchor="ctr" wrap="square" lIns="54864" rIns="54864" tIns="27432" bIns="27432">
-            <a:noAutofit/>
-          </a:bodyPr>
-          <a:lstStyle/>
-          <a:p>
-            <a:pPr algn="ctr">
-              <a:lnSpc>
-                <a:spcPct val="100000"/>
-              </a:lnSpc>
-            </a:pPr>
-            <a:r>
-              <a:rPr sz="1600" b="1" i="0">
-                <a:solidFill>
-                  <a:srgbClr val="FFFFFF"/>
-                </a:solidFill>
-              </a:rPr>
-              <a:t>2</a:t>
-            </a:r>
-          </a:p>
-        </p:txBody>
-      </p:sp>
-      <p:sp>
-        <p:nvSpPr>
-          <p:cNvPr id="11" name="TextBox 10"/>
+          <p:cNvPr id="12" name="번호 2"/>
           <p:cNvSpPr txBox="1"/>
           <p:nvPr/>
         </p:nvSpPr>
         <p:spPr>
           <a:xfrm>
-            <a:off x="4490618" y="3840480"/>
-            <a:ext cx="3210458" cy="640080"/>
+            <a:off x="4444898" y="3383280"/>
+            <a:ext cx="914400" cy="548640"/>
           </a:xfrm>
           <a:prstGeom prst="rect">
             <a:avLst/>
@@ -4555,9 +4683,47 @@
               </a:lnSpc>
             </a:pPr>
             <a:r>
+              <a:rPr sz="2400" b="1" i="0">
+                <a:solidFill>
+                  <a:srgbClr val="7BB6EA"/>
+                </a:solidFill>
+              </a:rPr>
+              <a:t>02</a:t>
+            </a:r>
+          </a:p>
+        </p:txBody>
+      </p:sp>
+      <p:sp>
+        <p:nvSpPr>
+          <p:cNvPr id="13" name="TextBox 12"/>
+          <p:cNvSpPr txBox="1"/>
+          <p:nvPr/>
+        </p:nvSpPr>
+        <p:spPr>
+          <a:xfrm>
+            <a:off x="4490618" y="4023360"/>
+            <a:ext cx="3210458" cy="640080"/>
+          </a:xfrm>
+          <a:prstGeom prst="rect">
+            <a:avLst/>
+          </a:prstGeom>
+          <a:noFill/>
+        </p:spPr>
+        <p:txBody>
+          <a:bodyPr wrap="square" lIns="54864" rIns="54864" tIns="27432" bIns="27432" anchor="ctr">
+            <a:noAutofit/>
+          </a:bodyPr>
+          <a:lstStyle/>
+          <a:p>
+            <a:pPr algn="l">
+              <a:lnSpc>
+                <a:spcPct val="115000"/>
+              </a:lnSpc>
+            </a:pPr>
+            <a:r>
               <a:rPr sz="1800" b="1" i="0">
                 <a:solidFill>
-                  <a:srgbClr val="113B5F"/>
+                  <a:srgbClr val="273949"/>
                 </a:solidFill>
               </a:rPr>
               <a:t>해 볼 것</a:t>
@@ -4567,13 +4733,13 @@
       </p:sp>
       <p:sp>
         <p:nvSpPr>
-          <p:cNvPr id="12" name="TextBox 11"/>
+          <p:cNvPr id="14" name="TextBox 13"/>
           <p:cNvSpPr txBox="1"/>
           <p:nvPr/>
         </p:nvSpPr>
         <p:spPr>
           <a:xfrm>
-            <a:off x="4490618" y="4526280"/>
+            <a:off x="4490618" y="4709160"/>
             <a:ext cx="3210458" cy="1417319"/>
           </a:xfrm>
           <a:prstGeom prst="rect">
@@ -4595,7 +4761,7 @@
             <a:r>
               <a:rPr sz="1600" b="0" i="0">
                 <a:solidFill>
-                  <a:srgbClr val="2B2B2B"/>
+                  <a:srgbClr val="26231F"/>
                 </a:solidFill>
               </a:rPr>
               <a:t>내용을 입력하세요</a:t>
@@ -4610,7 +4776,7 @@
             <a:r>
               <a:rPr sz="1600" b="0" i="0">
                 <a:solidFill>
-                  <a:srgbClr val="2B2B2B"/>
+                  <a:srgbClr val="26231F"/>
                 </a:solidFill>
               </a:rPr>
               <a:t>내용을 입력하세요</a:t>
@@ -4620,26 +4786,24 @@
       </p:sp>
       <p:sp>
         <p:nvSpPr>
-          <p:cNvPr id="13" name="카드 3"/>
+          <p:cNvPr id="15" name="카드 3"/>
           <p:cNvSpPr/>
           <p:nvPr/>
         </p:nvSpPr>
         <p:spPr>
           <a:xfrm>
-            <a:off x="8066836" y="3063240"/>
+            <a:off x="8066836" y="3246120"/>
             <a:ext cx="3484778" cy="3017520"/>
           </a:xfrm>
           <a:prstGeom prst="roundRect">
             <a:avLst>
-              <a:gd name="adj" fmla="val 8000"/>
+              <a:gd name="adj" fmla="val 7000"/>
             </a:avLst>
           </a:prstGeom>
-          <a:solidFill>
-            <a:srgbClr val="EEF5FC"/>
-          </a:solidFill>
+          <a:noFill/>
           <a:ln w="15875">
             <a:solidFill>
-              <a:srgbClr val="D1E7FA"/>
+              <a:srgbClr val="7BB6EA"/>
             </a:solidFill>
           </a:ln>
         </p:spPr>
@@ -4653,57 +4817,14 @@
       </p:sp>
       <p:sp>
         <p:nvSpPr>
-          <p:cNvPr id="14" name="번호 3"/>
-          <p:cNvSpPr/>
-          <p:nvPr/>
-        </p:nvSpPr>
-        <p:spPr>
-          <a:xfrm>
-            <a:off x="8249716" y="3246120"/>
-            <a:ext cx="457200" cy="457200"/>
-          </a:xfrm>
-          <a:prstGeom prst="ellipse">
-            <a:avLst/>
-          </a:prstGeom>
-          <a:solidFill>
-            <a:srgbClr val="267BC5"/>
-          </a:solidFill>
-          <a:ln>
-            <a:noFill/>
-          </a:ln>
-        </p:spPr>
-        <p:txBody>
-          <a:bodyPr rtlCol="0" anchor="ctr" wrap="square" lIns="54864" rIns="54864" tIns="27432" bIns="27432">
-            <a:noAutofit/>
-          </a:bodyPr>
-          <a:lstStyle/>
-          <a:p>
-            <a:pPr algn="ctr">
-              <a:lnSpc>
-                <a:spcPct val="100000"/>
-              </a:lnSpc>
-            </a:pPr>
-            <a:r>
-              <a:rPr sz="1600" b="1" i="0">
-                <a:solidFill>
-                  <a:srgbClr val="FFFFFF"/>
-                </a:solidFill>
-              </a:rPr>
-              <a:t>3</a:t>
-            </a:r>
-          </a:p>
-        </p:txBody>
-      </p:sp>
-      <p:sp>
-        <p:nvSpPr>
-          <p:cNvPr id="15" name="TextBox 14"/>
+          <p:cNvPr id="16" name="번호 3"/>
           <p:cNvSpPr txBox="1"/>
           <p:nvPr/>
         </p:nvSpPr>
         <p:spPr>
           <a:xfrm>
-            <a:off x="8203996" y="3840480"/>
-            <a:ext cx="3210458" cy="640080"/>
+            <a:off x="8158276" y="3383280"/>
+            <a:ext cx="914400" cy="548640"/>
           </a:xfrm>
           <a:prstGeom prst="rect">
             <a:avLst/>
@@ -4722,9 +4843,47 @@
               </a:lnSpc>
             </a:pPr>
             <a:r>
+              <a:rPr sz="2400" b="1" i="0">
+                <a:solidFill>
+                  <a:srgbClr val="7BB6EA"/>
+                </a:solidFill>
+              </a:rPr>
+              <a:t>03</a:t>
+            </a:r>
+          </a:p>
+        </p:txBody>
+      </p:sp>
+      <p:sp>
+        <p:nvSpPr>
+          <p:cNvPr id="17" name="TextBox 16"/>
+          <p:cNvSpPr txBox="1"/>
+          <p:nvPr/>
+        </p:nvSpPr>
+        <p:spPr>
+          <a:xfrm>
+            <a:off x="8203996" y="4023360"/>
+            <a:ext cx="3210458" cy="640080"/>
+          </a:xfrm>
+          <a:prstGeom prst="rect">
+            <a:avLst/>
+          </a:prstGeom>
+          <a:noFill/>
+        </p:spPr>
+        <p:txBody>
+          <a:bodyPr wrap="square" lIns="54864" rIns="54864" tIns="27432" bIns="27432" anchor="ctr">
+            <a:noAutofit/>
+          </a:bodyPr>
+          <a:lstStyle/>
+          <a:p>
+            <a:pPr algn="l">
+              <a:lnSpc>
+                <a:spcPct val="115000"/>
+              </a:lnSpc>
+            </a:pPr>
+            <a:r>
               <a:rPr sz="1800" b="1" i="0">
                 <a:solidFill>
-                  <a:srgbClr val="113B5F"/>
+                  <a:srgbClr val="273949"/>
                 </a:solidFill>
               </a:rPr>
               <a:t>기억할 것</a:t>
@@ -4734,13 +4893,13 @@
       </p:sp>
       <p:sp>
         <p:nvSpPr>
-          <p:cNvPr id="16" name="TextBox 15"/>
+          <p:cNvPr id="18" name="TextBox 17"/>
           <p:cNvSpPr txBox="1"/>
           <p:nvPr/>
         </p:nvSpPr>
         <p:spPr>
           <a:xfrm>
-            <a:off x="8203996" y="4526280"/>
+            <a:off x="8203996" y="4709160"/>
             <a:ext cx="3210458" cy="1417319"/>
           </a:xfrm>
           <a:prstGeom prst="rect">
@@ -4762,7 +4921,7 @@
             <a:r>
               <a:rPr sz="1600" b="0" i="0">
                 <a:solidFill>
-                  <a:srgbClr val="2B2B2B"/>
+                  <a:srgbClr val="26231F"/>
                 </a:solidFill>
               </a:rPr>
               <a:t>내용을 입력하세요</a:t>
@@ -4777,7 +4936,7 @@
             <a:r>
               <a:rPr sz="1600" b="0" i="0">
                 <a:solidFill>
-                  <a:srgbClr val="2B2B2B"/>
+                  <a:srgbClr val="26231F"/>
                 </a:solidFill>
               </a:rPr>
               <a:t>내용을 입력하세요</a:t>
@@ -4799,7 +4958,7 @@
     <p:bg>
       <p:bgPr>
         <a:solidFill>
-          <a:srgbClr val="EEF5FC"/>
+          <a:srgbClr val="FFFFFF"/>
         </a:solidFill>
         <a:effectLst/>
       </p:bgPr>
@@ -4813,23 +4972,20 @@
       <p:grpSpPr/>
       <p:sp>
         <p:nvSpPr>
-          <p:cNvPr id="3" name="장식"/>
+          <p:cNvPr id="3" name="포인트"/>
           <p:cNvSpPr/>
           <p:nvPr/>
         </p:nvSpPr>
         <p:spPr>
-          <a:xfrm rot="10800000">
-            <a:off x="10637215" y="0"/>
-            <a:ext cx="914400" cy="1554480"/>
-          </a:xfrm>
-          <a:prstGeom prst="round2SameRect">
-            <a:avLst>
-              <a:gd name="adj1" fmla="val 50000"/>
-              <a:gd name="adj2" fmla="val 0"/>
-            </a:avLst>
+          <a:xfrm>
+            <a:off x="5958687" y="246888"/>
+            <a:ext cx="274320" cy="109728"/>
+          </a:xfrm>
+          <a:prstGeom prst="wave">
+            <a:avLst/>
           </a:prstGeom>
           <a:solidFill>
-            <a:srgbClr val="D1E7FA"/>
+            <a:srgbClr val="7BB6EA"/>
           </a:solidFill>
           <a:ln>
             <a:noFill/>
@@ -4840,6 +4996,73 @@
           <a:lstStyle/>
           <a:p>
             <a:pPr algn="ctr"/>
+          </a:p>
+        </p:txBody>
+      </p:sp>
+      <p:sp>
+        <p:nvSpPr>
+          <p:cNvPr id="4" name="장식"/>
+          <p:cNvSpPr/>
+          <p:nvPr/>
+        </p:nvSpPr>
+        <p:spPr>
+          <a:xfrm>
+            <a:off x="5684367" y="1572768"/>
+            <a:ext cx="822960" cy="22860"/>
+          </a:xfrm>
+          <a:prstGeom prst="rect">
+            <a:avLst/>
+          </a:prstGeom>
+          <a:solidFill>
+            <a:srgbClr val="7BB6EA"/>
+          </a:solidFill>
+          <a:ln>
+            <a:noFill/>
+          </a:ln>
+        </p:spPr>
+        <p:txBody>
+          <a:bodyPr rtlCol="0" anchor="ctr"/>
+          <a:lstStyle/>
+          <a:p>
+            <a:pPr algn="ctr"/>
+          </a:p>
+        </p:txBody>
+      </p:sp>
+      <p:sp>
+        <p:nvSpPr>
+          <p:cNvPr id="5" name="상단 라벨"/>
+          <p:cNvSpPr txBox="1"/>
+          <p:nvPr/>
+        </p:nvSpPr>
+        <p:spPr>
+          <a:xfrm>
+            <a:off x="640080" y="182880"/>
+            <a:ext cx="3657600" cy="274320"/>
+          </a:xfrm>
+          <a:prstGeom prst="rect">
+            <a:avLst/>
+          </a:prstGeom>
+          <a:noFill/>
+        </p:spPr>
+        <p:txBody>
+          <a:bodyPr wrap="square" lIns="54864" rIns="54864" tIns="27432" bIns="27432" anchor="ctr">
+            <a:noAutofit/>
+          </a:bodyPr>
+          <a:lstStyle/>
+          <a:p>
+            <a:pPr algn="l">
+              <a:lnSpc>
+                <a:spcPct val="115000"/>
+              </a:lnSpc>
+            </a:pPr>
+            <a:r>
+              <a:rPr sz="800" b="1" i="0" spc="250">
+                <a:solidFill>
+                  <a:srgbClr val="8E8780"/>
+                </a:solidFill>
+              </a:rPr>
+              <a:t>PRESENTATION</a:t>
+            </a:r>
           </a:p>
         </p:txBody>
       </p:sp>
@@ -4855,8 +5078,8 @@
         </p:nvSpPr>
         <p:spPr>
           <a:xfrm>
-            <a:off x="640080" y="457200"/>
-            <a:ext cx="9722815" cy="868680"/>
+            <a:off x="1371600" y="640080"/>
+            <a:ext cx="9448495" cy="868680"/>
           </a:xfrm>
         </p:spPr>
         <p:txBody>
@@ -4865,7 +5088,7 @@
           </a:bodyPr>
           <a:lstStyle/>
           <a:p>
-            <a:pPr algn="l">
+            <a:pPr algn="ctr">
               <a:lnSpc>
                 <a:spcPct val="105000"/>
               </a:lnSpc>
@@ -4873,7 +5096,7 @@
             <a:r>
               <a:rPr sz="3000" b="1" i="0">
                 <a:solidFill>
-                  <a:srgbClr val="113B5F"/>
+                  <a:srgbClr val="26231F"/>
                 </a:solidFill>
               </a:rPr>
               <a:t>한눈에 비교</a:t>
@@ -4883,26 +5106,24 @@
       </p:sp>
       <p:sp>
         <p:nvSpPr>
-          <p:cNvPr id="4" name="왼쪽 칸"/>
+          <p:cNvPr id="6" name="왼쪽 칸"/>
           <p:cNvSpPr/>
           <p:nvPr/>
         </p:nvSpPr>
         <p:spPr>
           <a:xfrm>
-            <a:off x="640080" y="1600200"/>
-            <a:ext cx="5272887" cy="4800600"/>
+            <a:off x="640080" y="1783080"/>
+            <a:ext cx="5272887" cy="3291840"/>
           </a:xfrm>
           <a:prstGeom prst="roundRect">
             <a:avLst>
-              <a:gd name="adj" fmla="val 8000"/>
+              <a:gd name="adj" fmla="val 7000"/>
             </a:avLst>
           </a:prstGeom>
-          <a:solidFill>
-            <a:srgbClr val="EEF5FC"/>
-          </a:solidFill>
-          <a:ln w="12700">
+          <a:noFill/>
+          <a:ln w="15875">
             <a:solidFill>
-              <a:srgbClr val="D1E7FA"/>
+              <a:srgbClr val="7BB6EA"/>
             </a:solidFill>
           </a:ln>
         </p:spPr>
@@ -4916,13 +5137,13 @@
       </p:sp>
       <p:sp>
         <p:nvSpPr>
-          <p:cNvPr id="5" name="칸 제목 바"/>
+          <p:cNvPr id="7" name="칸 제목 바"/>
           <p:cNvSpPr/>
           <p:nvPr/>
         </p:nvSpPr>
         <p:spPr>
           <a:xfrm>
-            <a:off x="640080" y="1600200"/>
+            <a:off x="640080" y="1783080"/>
             <a:ext cx="5272887" cy="640080"/>
           </a:xfrm>
           <a:prstGeom prst="roundRect">
@@ -4931,7 +5152,7 @@
             </a:avLst>
           </a:prstGeom>
           <a:solidFill>
-            <a:srgbClr val="267BC5"/>
+            <a:srgbClr val="7BB6EA"/>
           </a:solidFill>
           <a:ln>
             <a:noFill/>
@@ -4947,13 +5168,13 @@
       </p:sp>
       <p:sp>
         <p:nvSpPr>
-          <p:cNvPr id="6" name="TextBox 5"/>
+          <p:cNvPr id="8" name="TextBox 7"/>
           <p:cNvSpPr txBox="1"/>
           <p:nvPr/>
         </p:nvSpPr>
         <p:spPr>
           <a:xfrm>
-            <a:off x="822959" y="1600200"/>
+            <a:off x="822959" y="1783080"/>
             <a:ext cx="4907127" cy="640080"/>
           </a:xfrm>
           <a:prstGeom prst="rect">
@@ -4975,7 +5196,7 @@
             <a:r>
               <a:rPr sz="1800" b="1" i="0">
                 <a:solidFill>
-                  <a:srgbClr val="FFFFFF"/>
+                  <a:srgbClr val="26231F"/>
                 </a:solidFill>
               </a:rPr>
               <a:t>알기 전</a:t>
@@ -4985,14 +5206,14 @@
       </p:sp>
       <p:sp>
         <p:nvSpPr>
-          <p:cNvPr id="7" name="TextBox 6"/>
+          <p:cNvPr id="9" name="TextBox 8"/>
           <p:cNvSpPr txBox="1"/>
           <p:nvPr/>
         </p:nvSpPr>
         <p:spPr>
           <a:xfrm>
-            <a:off x="868680" y="2423160"/>
-            <a:ext cx="4815687" cy="3886200"/>
+            <a:off x="868680" y="2606040"/>
+            <a:ext cx="4815687" cy="2377440"/>
           </a:xfrm>
           <a:prstGeom prst="rect">
             <a:avLst/>
@@ -5018,7 +5239,7 @@
             <a:r>
               <a:rPr sz="1500" b="0" i="0">
                 <a:solidFill>
-                  <a:srgbClr val="2B2B2B"/>
+                  <a:srgbClr val="26231F"/>
                 </a:solidFill>
               </a:rPr>
               <a:t>내용을 입력하세요</a:t>
@@ -5038,7 +5259,7 @@
             <a:r>
               <a:rPr sz="1500" b="0" i="0">
                 <a:solidFill>
-                  <a:srgbClr val="2B2B2B"/>
+                  <a:srgbClr val="26231F"/>
                 </a:solidFill>
               </a:rPr>
               <a:t>내용을 입력하세요</a:t>
@@ -5058,7 +5279,7 @@
             <a:r>
               <a:rPr sz="1500" b="0" i="0">
                 <a:solidFill>
-                  <a:srgbClr val="2B2B2B"/>
+                  <a:srgbClr val="26231F"/>
                 </a:solidFill>
               </a:rPr>
               <a:t>내용을 입력하세요</a:t>
@@ -5068,26 +5289,24 @@
       </p:sp>
       <p:sp>
         <p:nvSpPr>
-          <p:cNvPr id="8" name="오른쪽 칸"/>
+          <p:cNvPr id="10" name="오른쪽 칸"/>
           <p:cNvSpPr/>
           <p:nvPr/>
         </p:nvSpPr>
         <p:spPr>
           <a:xfrm>
-            <a:off x="6278727" y="1600200"/>
-            <a:ext cx="5272887" cy="4800600"/>
+            <a:off x="6278727" y="1783080"/>
+            <a:ext cx="5272887" cy="3291840"/>
           </a:xfrm>
           <a:prstGeom prst="roundRect">
             <a:avLst>
-              <a:gd name="adj" fmla="val 8000"/>
+              <a:gd name="adj" fmla="val 7000"/>
             </a:avLst>
           </a:prstGeom>
-          <a:solidFill>
-            <a:srgbClr val="D1E7FA"/>
-          </a:solidFill>
-          <a:ln w="12700">
+          <a:noFill/>
+          <a:ln w="15875">
             <a:solidFill>
-              <a:srgbClr val="D1E7FA"/>
+              <a:srgbClr val="7BB6EA"/>
             </a:solidFill>
           </a:ln>
         </p:spPr>
@@ -5101,13 +5320,13 @@
       </p:sp>
       <p:sp>
         <p:nvSpPr>
-          <p:cNvPr id="9" name="칸 제목 바"/>
+          <p:cNvPr id="11" name="칸 제목 바"/>
           <p:cNvSpPr/>
           <p:nvPr/>
         </p:nvSpPr>
         <p:spPr>
           <a:xfrm>
-            <a:off x="6278727" y="1600200"/>
+            <a:off x="6278727" y="1783080"/>
             <a:ext cx="5272887" cy="640080"/>
           </a:xfrm>
           <a:prstGeom prst="roundRect">
@@ -5116,7 +5335,7 @@
             </a:avLst>
           </a:prstGeom>
           <a:solidFill>
-            <a:srgbClr val="113B5F"/>
+            <a:srgbClr val="273949"/>
           </a:solidFill>
           <a:ln>
             <a:noFill/>
@@ -5132,13 +5351,13 @@
       </p:sp>
       <p:sp>
         <p:nvSpPr>
-          <p:cNvPr id="10" name="TextBox 9"/>
+          <p:cNvPr id="12" name="TextBox 11"/>
           <p:cNvSpPr txBox="1"/>
           <p:nvPr/>
         </p:nvSpPr>
         <p:spPr>
           <a:xfrm>
-            <a:off x="6461607" y="1600200"/>
+            <a:off x="6461607" y="1783080"/>
             <a:ext cx="4907127" cy="640080"/>
           </a:xfrm>
           <a:prstGeom prst="rect">
@@ -5170,14 +5389,14 @@
       </p:sp>
       <p:sp>
         <p:nvSpPr>
-          <p:cNvPr id="11" name="TextBox 10"/>
+          <p:cNvPr id="13" name="TextBox 12"/>
           <p:cNvSpPr txBox="1"/>
           <p:nvPr/>
         </p:nvSpPr>
         <p:spPr>
           <a:xfrm>
-            <a:off x="6507327" y="2423160"/>
-            <a:ext cx="4815687" cy="3886200"/>
+            <a:off x="6507327" y="2606040"/>
+            <a:ext cx="4815687" cy="2377440"/>
           </a:xfrm>
           <a:prstGeom prst="rect">
             <a:avLst/>
@@ -5203,7 +5422,7 @@
             <a:r>
               <a:rPr sz="1500" b="0" i="0">
                 <a:solidFill>
-                  <a:srgbClr val="2B2B2B"/>
+                  <a:srgbClr val="26231F"/>
                 </a:solidFill>
               </a:rPr>
               <a:t>내용을 입력하세요</a:t>
@@ -5223,7 +5442,7 @@
             <a:r>
               <a:rPr sz="1500" b="0" i="0">
                 <a:solidFill>
-                  <a:srgbClr val="2B2B2B"/>
+                  <a:srgbClr val="26231F"/>
                 </a:solidFill>
               </a:rPr>
               <a:t>내용을 입력하세요</a:t>
@@ -5243,7 +5462,7 @@
             <a:r>
               <a:rPr sz="1500" b="0" i="0">
                 <a:solidFill>
-                  <a:srgbClr val="2B2B2B"/>
+                  <a:srgbClr val="26231F"/>
                 </a:solidFill>
               </a:rPr>
               <a:t>내용을 입력하세요</a:t>
@@ -5265,7 +5484,7 @@
     <p:bg>
       <p:bgPr>
         <a:solidFill>
-          <a:srgbClr val="EEF5FC"/>
+          <a:srgbClr val="FFFFFF"/>
         </a:solidFill>
         <a:effectLst/>
       </p:bgPr>
@@ -5279,23 +5498,20 @@
       <p:grpSpPr/>
       <p:sp>
         <p:nvSpPr>
-          <p:cNvPr id="3" name="장식"/>
+          <p:cNvPr id="3" name="포인트"/>
           <p:cNvSpPr/>
           <p:nvPr/>
         </p:nvSpPr>
         <p:spPr>
-          <a:xfrm rot="10800000">
-            <a:off x="10637215" y="0"/>
-            <a:ext cx="914400" cy="1554480"/>
-          </a:xfrm>
-          <a:prstGeom prst="round2SameRect">
-            <a:avLst>
-              <a:gd name="adj1" fmla="val 50000"/>
-              <a:gd name="adj2" fmla="val 0"/>
-            </a:avLst>
+          <a:xfrm>
+            <a:off x="5958687" y="246888"/>
+            <a:ext cx="274320" cy="109728"/>
+          </a:xfrm>
+          <a:prstGeom prst="wave">
+            <a:avLst/>
           </a:prstGeom>
           <a:solidFill>
-            <a:srgbClr val="D1E7FA"/>
+            <a:srgbClr val="7BB6EA"/>
           </a:solidFill>
           <a:ln>
             <a:noFill/>
@@ -5306,6 +5522,73 @@
           <a:lstStyle/>
           <a:p>
             <a:pPr algn="ctr"/>
+          </a:p>
+        </p:txBody>
+      </p:sp>
+      <p:sp>
+        <p:nvSpPr>
+          <p:cNvPr id="4" name="장식"/>
+          <p:cNvSpPr/>
+          <p:nvPr/>
+        </p:nvSpPr>
+        <p:spPr>
+          <a:xfrm>
+            <a:off x="5684367" y="1572768"/>
+            <a:ext cx="822960" cy="22860"/>
+          </a:xfrm>
+          <a:prstGeom prst="rect">
+            <a:avLst/>
+          </a:prstGeom>
+          <a:solidFill>
+            <a:srgbClr val="7BB6EA"/>
+          </a:solidFill>
+          <a:ln>
+            <a:noFill/>
+          </a:ln>
+        </p:spPr>
+        <p:txBody>
+          <a:bodyPr rtlCol="0" anchor="ctr"/>
+          <a:lstStyle/>
+          <a:p>
+            <a:pPr algn="ctr"/>
+          </a:p>
+        </p:txBody>
+      </p:sp>
+      <p:sp>
+        <p:nvSpPr>
+          <p:cNvPr id="5" name="상단 라벨"/>
+          <p:cNvSpPr txBox="1"/>
+          <p:nvPr/>
+        </p:nvSpPr>
+        <p:spPr>
+          <a:xfrm>
+            <a:off x="640080" y="182880"/>
+            <a:ext cx="3657600" cy="274320"/>
+          </a:xfrm>
+          <a:prstGeom prst="rect">
+            <a:avLst/>
+          </a:prstGeom>
+          <a:noFill/>
+        </p:spPr>
+        <p:txBody>
+          <a:bodyPr wrap="square" lIns="54864" rIns="54864" tIns="27432" bIns="27432" anchor="ctr">
+            <a:noAutofit/>
+          </a:bodyPr>
+          <a:lstStyle/>
+          <a:p>
+            <a:pPr algn="l">
+              <a:lnSpc>
+                <a:spcPct val="115000"/>
+              </a:lnSpc>
+            </a:pPr>
+            <a:r>
+              <a:rPr sz="800" b="1" i="0" spc="250">
+                <a:solidFill>
+                  <a:srgbClr val="8E8780"/>
+                </a:solidFill>
+              </a:rPr>
+              <a:t>PRESENTATION</a:t>
+            </a:r>
           </a:p>
         </p:txBody>
       </p:sp>
@@ -5321,8 +5604,8 @@
         </p:nvSpPr>
         <p:spPr>
           <a:xfrm>
-            <a:off x="640080" y="457200"/>
-            <a:ext cx="9722815" cy="868680"/>
+            <a:off x="1371600" y="640080"/>
+            <a:ext cx="9448495" cy="868680"/>
           </a:xfrm>
         </p:spPr>
         <p:txBody>
@@ -5331,7 +5614,7 @@
           </a:bodyPr>
           <a:lstStyle/>
           <a:p>
-            <a:pPr algn="l">
+            <a:pPr algn="ctr">
               <a:lnSpc>
                 <a:spcPct val="105000"/>
               </a:lnSpc>
@@ -5339,7 +5622,7 @@
             <a:r>
               <a:rPr sz="3000" b="1" i="0">
                 <a:solidFill>
-                  <a:srgbClr val="113B5F"/>
+                  <a:srgbClr val="26231F"/>
                 </a:solidFill>
               </a:rPr>
               <a:t>일정·현황</a:t>
@@ -5349,14 +5632,14 @@
       </p:sp>
       <p:graphicFrame>
         <p:nvGraphicFramePr>
-          <p:cNvPr id="4" name="표"/>
+          <p:cNvPr id="6" name="표"/>
           <p:cNvGraphicFramePr>
             <a:graphicFrameLocks noGrp="1"/>
           </p:cNvGraphicFramePr>
           <p:nvPr/>
         </p:nvGraphicFramePr>
         <p:xfrm>
-          <a:off x="640080" y="1600200"/>
+          <a:off x="640080" y="1783080"/>
           <a:ext cx="10911532" cy="3840480"/>
         </p:xfrm>
         <a:graphic>
@@ -5381,7 +5664,7 @@
                       <a:r>
                         <a:rPr sz="1500" b="1">
                           <a:solidFill>
-                            <a:srgbClr val="FFFFFF"/>
+                            <a:srgbClr val="26231F"/>
                           </a:solidFill>
                         </a:rPr>
                         <a:t>차시</a:t>
@@ -5391,30 +5674,30 @@
                   <a:tcPr anchor="ctr" marL="73152" marR="73152">
                     <a:lnL w="9525" cap="flat" cmpd="sng" algn="ctr">
                       <a:solidFill>
-                        <a:srgbClr val="267BC5"/>
+                        <a:srgbClr val="7BB6EA"/>
                       </a:solidFill>
                       <a:prstDash val="solid"/>
                     </a:lnL>
                     <a:lnR w="9525" cap="flat" cmpd="sng" algn="ctr">
                       <a:solidFill>
-                        <a:srgbClr val="267BC5"/>
+                        <a:srgbClr val="7BB6EA"/>
                       </a:solidFill>
                       <a:prstDash val="solid"/>
                     </a:lnR>
                     <a:lnT w="9525" cap="flat" cmpd="sng" algn="ctr">
                       <a:solidFill>
-                        <a:srgbClr val="267BC5"/>
+                        <a:srgbClr val="7BB6EA"/>
                       </a:solidFill>
                       <a:prstDash val="solid"/>
                     </a:lnT>
                     <a:lnB w="9525" cap="flat" cmpd="sng" algn="ctr">
                       <a:solidFill>
-                        <a:srgbClr val="267BC5"/>
+                        <a:srgbClr val="7BB6EA"/>
                       </a:solidFill>
                       <a:prstDash val="solid"/>
                     </a:lnB>
                     <a:solidFill>
-                      <a:srgbClr val="267BC5"/>
+                      <a:srgbClr val="7BB6EA"/>
                     </a:solidFill>
                   </a:tcPr>
                 </a:tc>
@@ -5427,7 +5710,7 @@
                       <a:r>
                         <a:rPr sz="1500" b="1">
                           <a:solidFill>
-                            <a:srgbClr val="FFFFFF"/>
+                            <a:srgbClr val="26231F"/>
                           </a:solidFill>
                         </a:rPr>
                         <a:t>주제</a:t>
@@ -5437,30 +5720,30 @@
                   <a:tcPr anchor="ctr" marL="73152" marR="73152">
                     <a:lnL w="9525" cap="flat" cmpd="sng" algn="ctr">
                       <a:solidFill>
-                        <a:srgbClr val="267BC5"/>
+                        <a:srgbClr val="7BB6EA"/>
                       </a:solidFill>
                       <a:prstDash val="solid"/>
                     </a:lnL>
                     <a:lnR w="9525" cap="flat" cmpd="sng" algn="ctr">
                       <a:solidFill>
-                        <a:srgbClr val="267BC5"/>
+                        <a:srgbClr val="7BB6EA"/>
                       </a:solidFill>
                       <a:prstDash val="solid"/>
                     </a:lnR>
                     <a:lnT w="9525" cap="flat" cmpd="sng" algn="ctr">
                       <a:solidFill>
-                        <a:srgbClr val="267BC5"/>
+                        <a:srgbClr val="7BB6EA"/>
                       </a:solidFill>
                       <a:prstDash val="solid"/>
                     </a:lnT>
                     <a:lnB w="9525" cap="flat" cmpd="sng" algn="ctr">
                       <a:solidFill>
-                        <a:srgbClr val="267BC5"/>
+                        <a:srgbClr val="7BB6EA"/>
                       </a:solidFill>
                       <a:prstDash val="solid"/>
                     </a:lnB>
                     <a:solidFill>
-                      <a:srgbClr val="267BC5"/>
+                      <a:srgbClr val="7BB6EA"/>
                     </a:solidFill>
                   </a:tcPr>
                 </a:tc>
@@ -5473,7 +5756,7 @@
                       <a:r>
                         <a:rPr sz="1500" b="1">
                           <a:solidFill>
-                            <a:srgbClr val="FFFFFF"/>
+                            <a:srgbClr val="26231F"/>
                           </a:solidFill>
                         </a:rPr>
                         <a:t>시간</a:t>
@@ -5483,30 +5766,30 @@
                   <a:tcPr anchor="ctr" marL="73152" marR="73152">
                     <a:lnL w="9525" cap="flat" cmpd="sng" algn="ctr">
                       <a:solidFill>
-                        <a:srgbClr val="267BC5"/>
+                        <a:srgbClr val="7BB6EA"/>
                       </a:solidFill>
                       <a:prstDash val="solid"/>
                     </a:lnL>
                     <a:lnR w="9525" cap="flat" cmpd="sng" algn="ctr">
                       <a:solidFill>
-                        <a:srgbClr val="267BC5"/>
+                        <a:srgbClr val="7BB6EA"/>
                       </a:solidFill>
                       <a:prstDash val="solid"/>
                     </a:lnR>
                     <a:lnT w="9525" cap="flat" cmpd="sng" algn="ctr">
                       <a:solidFill>
-                        <a:srgbClr val="267BC5"/>
+                        <a:srgbClr val="7BB6EA"/>
                       </a:solidFill>
                       <a:prstDash val="solid"/>
                     </a:lnT>
                     <a:lnB w="9525" cap="flat" cmpd="sng" algn="ctr">
                       <a:solidFill>
-                        <a:srgbClr val="267BC5"/>
+                        <a:srgbClr val="7BB6EA"/>
                       </a:solidFill>
                       <a:prstDash val="solid"/>
                     </a:lnB>
                     <a:solidFill>
-                      <a:srgbClr val="267BC5"/>
+                      <a:srgbClr val="7BB6EA"/>
                     </a:solidFill>
                   </a:tcPr>
                 </a:tc>
@@ -5519,7 +5802,7 @@
                       <a:r>
                         <a:rPr sz="1500" b="1">
                           <a:solidFill>
-                            <a:srgbClr val="FFFFFF"/>
+                            <a:srgbClr val="26231F"/>
                           </a:solidFill>
                         </a:rPr>
                         <a:t>준비물</a:t>
@@ -5529,30 +5812,30 @@
                   <a:tcPr anchor="ctr" marL="73152" marR="73152">
                     <a:lnL w="9525" cap="flat" cmpd="sng" algn="ctr">
                       <a:solidFill>
-                        <a:srgbClr val="267BC5"/>
+                        <a:srgbClr val="7BB6EA"/>
                       </a:solidFill>
                       <a:prstDash val="solid"/>
                     </a:lnL>
                     <a:lnR w="9525" cap="flat" cmpd="sng" algn="ctr">
                       <a:solidFill>
-                        <a:srgbClr val="267BC5"/>
+                        <a:srgbClr val="7BB6EA"/>
                       </a:solidFill>
                       <a:prstDash val="solid"/>
                     </a:lnR>
                     <a:lnT w="9525" cap="flat" cmpd="sng" algn="ctr">
                       <a:solidFill>
-                        <a:srgbClr val="267BC5"/>
+                        <a:srgbClr val="7BB6EA"/>
                       </a:solidFill>
                       <a:prstDash val="solid"/>
                     </a:lnT>
                     <a:lnB w="9525" cap="flat" cmpd="sng" algn="ctr">
                       <a:solidFill>
-                        <a:srgbClr val="267BC5"/>
+                        <a:srgbClr val="7BB6EA"/>
                       </a:solidFill>
                       <a:prstDash val="solid"/>
                     </a:lnB>
                     <a:solidFill>
-                      <a:srgbClr val="267BC5"/>
+                      <a:srgbClr val="7BB6EA"/>
                     </a:solidFill>
                   </a:tcPr>
                 </a:tc>
@@ -5567,7 +5850,7 @@
                       <a:r>
                         <a:rPr sz="1500" b="1">
                           <a:solidFill>
-                            <a:srgbClr val="113B5F"/>
+                            <a:srgbClr val="273949"/>
                           </a:solidFill>
                         </a:rPr>
                         <a:t>1</a:t>
@@ -5613,7 +5896,7 @@
                       <a:r>
                         <a:rPr sz="1500" b="0">
                           <a:solidFill>
-                            <a:srgbClr val="2B2B2B"/>
+                            <a:srgbClr val="26231F"/>
                           </a:solidFill>
                         </a:rPr>
                         <a:t>내용 입력</a:t>
@@ -5659,7 +5942,7 @@
                       <a:r>
                         <a:rPr sz="1500" b="0">
                           <a:solidFill>
-                            <a:srgbClr val="2B2B2B"/>
+                            <a:srgbClr val="26231F"/>
                           </a:solidFill>
                         </a:rPr>
                         <a:t/>
@@ -5705,7 +5988,7 @@
                       <a:r>
                         <a:rPr sz="1500" b="0">
                           <a:solidFill>
-                            <a:srgbClr val="2B2B2B"/>
+                            <a:srgbClr val="26231F"/>
                           </a:solidFill>
                         </a:rPr>
                         <a:t/>
@@ -5753,7 +6036,7 @@
                       <a:r>
                         <a:rPr sz="1500" b="1">
                           <a:solidFill>
-                            <a:srgbClr val="113B5F"/>
+                            <a:srgbClr val="273949"/>
                           </a:solidFill>
                         </a:rPr>
                         <a:t>2</a:t>
@@ -5799,7 +6082,7 @@
                       <a:r>
                         <a:rPr sz="1500" b="0">
                           <a:solidFill>
-                            <a:srgbClr val="2B2B2B"/>
+                            <a:srgbClr val="26231F"/>
                           </a:solidFill>
                         </a:rPr>
                         <a:t>내용 입력</a:t>
@@ -5832,7 +6115,7 @@
                       <a:prstDash val="solid"/>
                     </a:lnB>
                     <a:solidFill>
-                      <a:srgbClr val="EEF5FC"/>
+                      <a:srgbClr val="EAF4FD"/>
                     </a:solidFill>
                   </a:tcPr>
                 </a:tc>
@@ -5845,7 +6128,7 @@
                       <a:r>
                         <a:rPr sz="1500" b="0">
                           <a:solidFill>
-                            <a:srgbClr val="2B2B2B"/>
+                            <a:srgbClr val="26231F"/>
                           </a:solidFill>
                         </a:rPr>
                         <a:t/>
@@ -5878,7 +6161,7 @@
                       <a:prstDash val="solid"/>
                     </a:lnB>
                     <a:solidFill>
-                      <a:srgbClr val="EEF5FC"/>
+                      <a:srgbClr val="EAF4FD"/>
                     </a:solidFill>
                   </a:tcPr>
                 </a:tc>
@@ -5891,7 +6174,7 @@
                       <a:r>
                         <a:rPr sz="1500" b="0">
                           <a:solidFill>
-                            <a:srgbClr val="2B2B2B"/>
+                            <a:srgbClr val="26231F"/>
                           </a:solidFill>
                         </a:rPr>
                         <a:t/>
@@ -5924,7 +6207,7 @@
                       <a:prstDash val="solid"/>
                     </a:lnB>
                     <a:solidFill>
-                      <a:srgbClr val="EEF5FC"/>
+                      <a:srgbClr val="EAF4FD"/>
                     </a:solidFill>
                   </a:tcPr>
                 </a:tc>
@@ -5939,7 +6222,7 @@
                       <a:r>
                         <a:rPr sz="1500" b="1">
                           <a:solidFill>
-                            <a:srgbClr val="113B5F"/>
+                            <a:srgbClr val="273949"/>
                           </a:solidFill>
                         </a:rPr>
                         <a:t>3</a:t>
@@ -5985,7 +6268,7 @@
                       <a:r>
                         <a:rPr sz="1500" b="0">
                           <a:solidFill>
-                            <a:srgbClr val="2B2B2B"/>
+                            <a:srgbClr val="26231F"/>
                           </a:solidFill>
                         </a:rPr>
                         <a:t>내용 입력</a:t>
@@ -6031,7 +6314,7 @@
                       <a:r>
                         <a:rPr sz="1500" b="0">
                           <a:solidFill>
-                            <a:srgbClr val="2B2B2B"/>
+                            <a:srgbClr val="26231F"/>
                           </a:solidFill>
                         </a:rPr>
                         <a:t/>
@@ -6077,7 +6360,7 @@
                       <a:r>
                         <a:rPr sz="1500" b="0">
                           <a:solidFill>
-                            <a:srgbClr val="2B2B2B"/>
+                            <a:srgbClr val="26231F"/>
                           </a:solidFill>
                         </a:rPr>
                         <a:t/>
@@ -6125,7 +6408,7 @@
                       <a:r>
                         <a:rPr sz="1500" b="1">
                           <a:solidFill>
-                            <a:srgbClr val="113B5F"/>
+                            <a:srgbClr val="273949"/>
                           </a:solidFill>
                         </a:rPr>
                         <a:t>4</a:t>
@@ -6171,7 +6454,7 @@
                       <a:r>
                         <a:rPr sz="1500" b="0">
                           <a:solidFill>
-                            <a:srgbClr val="2B2B2B"/>
+                            <a:srgbClr val="26231F"/>
                           </a:solidFill>
                         </a:rPr>
                         <a:t>내용 입력</a:t>
@@ -6204,7 +6487,7 @@
                       <a:prstDash val="solid"/>
                     </a:lnB>
                     <a:solidFill>
-                      <a:srgbClr val="EEF5FC"/>
+                      <a:srgbClr val="EAF4FD"/>
                     </a:solidFill>
                   </a:tcPr>
                 </a:tc>
@@ -6217,7 +6500,7 @@
                       <a:r>
                         <a:rPr sz="1500" b="0">
                           <a:solidFill>
-                            <a:srgbClr val="2B2B2B"/>
+                            <a:srgbClr val="26231F"/>
                           </a:solidFill>
                         </a:rPr>
                         <a:t/>
@@ -6250,7 +6533,7 @@
                       <a:prstDash val="solid"/>
                     </a:lnB>
                     <a:solidFill>
-                      <a:srgbClr val="EEF5FC"/>
+                      <a:srgbClr val="EAF4FD"/>
                     </a:solidFill>
                   </a:tcPr>
                 </a:tc>
@@ -6263,7 +6546,7 @@
                       <a:r>
                         <a:rPr sz="1500" b="0">
                           <a:solidFill>
-                            <a:srgbClr val="2B2B2B"/>
+                            <a:srgbClr val="26231F"/>
                           </a:solidFill>
                         </a:rPr>
                         <a:t/>
@@ -6296,7 +6579,7 @@
                       <a:prstDash val="solid"/>
                     </a:lnB>
                     <a:solidFill>
-                      <a:srgbClr val="EEF5FC"/>
+                      <a:srgbClr val="EAF4FD"/>
                     </a:solidFill>
                   </a:tcPr>
                 </a:tc>
@@ -6311,7 +6594,7 @@
                       <a:r>
                         <a:rPr sz="1500" b="1">
                           <a:solidFill>
-                            <a:srgbClr val="113B5F"/>
+                            <a:srgbClr val="273949"/>
                           </a:solidFill>
                         </a:rPr>
                         <a:t>5</a:t>
@@ -6357,7 +6640,7 @@
                       <a:r>
                         <a:rPr sz="1500" b="0">
                           <a:solidFill>
-                            <a:srgbClr val="2B2B2B"/>
+                            <a:srgbClr val="26231F"/>
                           </a:solidFill>
                         </a:rPr>
                         <a:t>내용 입력</a:t>
@@ -6403,7 +6686,7 @@
                       <a:r>
                         <a:rPr sz="1500" b="0">
                           <a:solidFill>
-                            <a:srgbClr val="2B2B2B"/>
+                            <a:srgbClr val="26231F"/>
                           </a:solidFill>
                         </a:rPr>
                         <a:t/>
@@ -6449,7 +6732,7 @@
                       <a:r>
                         <a:rPr sz="1500" b="0">
                           <a:solidFill>
-                            <a:srgbClr val="2B2B2B"/>
+                            <a:srgbClr val="26231F"/>
                           </a:solidFill>
                         </a:rPr>
                         <a:t/>
@@ -6502,6 +6785,14 @@
 <file path=ppt/slides/slide6.xml><?xml version="1.0" encoding="utf-8"?>
 <p:sld xmlns:a="http://schemas.openxmlformats.org/drawingml/2006/main" xmlns:p="http://schemas.openxmlformats.org/presentationml/2006/main" xmlns:r="http://schemas.openxmlformats.org/officeDocument/2006/relationships">
   <p:cSld>
+    <p:bg>
+      <p:bgPr>
+        <a:solidFill>
+          <a:srgbClr val="EAF4FD"/>
+        </a:solidFill>
+        <a:effectLst/>
+      </p:bgPr>
+    </p:bg>
     <p:spTree>
       <p:nvGrpSpPr>
         <p:cNvPr id="1" name=""/>
@@ -6509,30 +6800,102 @@
         <p:nvPr/>
       </p:nvGrpSpPr>
       <p:grpSpPr/>
-      <p:pic>
-        <p:nvPicPr>
-          <p:cNvPr id="3" name="표지 그림" descr="talk-22.jpg"/>
-          <p:cNvPicPr>
-            <a:picLocks noChangeAspect="1"/>
-          </p:cNvPicPr>
+      <p:sp>
+        <p:nvSpPr>
+          <p:cNvPr id="3" name="장식"/>
+          <p:cNvSpPr/>
           <p:nvPr/>
-        </p:nvPicPr>
-        <p:blipFill>
-          <a:blip r:embed="rId2"/>
-          <a:stretch>
-            <a:fillRect/>
-          </a:stretch>
-        </p:blipFill>
-        <p:spPr>
-          <a:xfrm>
-            <a:off x="0" y="0"/>
-            <a:ext cx="12191695" cy="6858000"/>
+        </p:nvSpPr>
+        <p:spPr>
+          <a:xfrm>
+            <a:off x="8534186" y="0"/>
+            <a:ext cx="3657508" cy="6858000"/>
           </a:xfrm>
           <a:prstGeom prst="rect">
             <a:avLst/>
           </a:prstGeom>
-        </p:spPr>
-      </p:pic>
+          <a:solidFill>
+            <a:srgbClr val="7BB6EA"/>
+          </a:solidFill>
+          <a:ln>
+            <a:noFill/>
+          </a:ln>
+        </p:spPr>
+        <p:txBody>
+          <a:bodyPr rtlCol="0" anchor="ctr"/>
+          <a:lstStyle/>
+          <a:p>
+            <a:pPr algn="ctr"/>
+          </a:p>
+        </p:txBody>
+      </p:sp>
+      <p:sp>
+        <p:nvSpPr>
+          <p:cNvPr id="4" name="장식"/>
+          <p:cNvSpPr/>
+          <p:nvPr/>
+        </p:nvSpPr>
+        <p:spPr>
+          <a:xfrm>
+            <a:off x="7985546" y="2880360"/>
+            <a:ext cx="1097280" cy="1097280"/>
+          </a:xfrm>
+          <a:prstGeom prst="ellipse">
+            <a:avLst/>
+          </a:prstGeom>
+          <a:solidFill>
+            <a:srgbClr val="A5CFF3"/>
+          </a:solidFill>
+          <a:ln>
+            <a:noFill/>
+          </a:ln>
+        </p:spPr>
+        <p:txBody>
+          <a:bodyPr rtlCol="0" anchor="ctr"/>
+          <a:lstStyle/>
+          <a:p>
+            <a:pPr algn="ctr"/>
+          </a:p>
+        </p:txBody>
+      </p:sp>
+      <p:sp>
+        <p:nvSpPr>
+          <p:cNvPr id="5" name="라벨"/>
+          <p:cNvSpPr txBox="1"/>
+          <p:nvPr/>
+        </p:nvSpPr>
+        <p:spPr>
+          <a:xfrm>
+            <a:off x="822960" y="2148840"/>
+            <a:ext cx="6705432" cy="274320"/>
+          </a:xfrm>
+          <a:prstGeom prst="rect">
+            <a:avLst/>
+          </a:prstGeom>
+          <a:noFill/>
+        </p:spPr>
+        <p:txBody>
+          <a:bodyPr wrap="square" lIns="54864" rIns="54864" tIns="27432" bIns="27432" anchor="t">
+            <a:noAutofit/>
+          </a:bodyPr>
+          <a:lstStyle/>
+          <a:p>
+            <a:pPr algn="l">
+              <a:lnSpc>
+                <a:spcPct val="115000"/>
+              </a:lnSpc>
+            </a:pPr>
+            <a:r>
+              <a:rPr sz="1000" b="1" i="0" spc="250">
+                <a:solidFill>
+                  <a:srgbClr val="26231F"/>
+                </a:solidFill>
+              </a:rPr>
+              <a:t>PRESENTATION</a:t>
+            </a:r>
+          </a:p>
+        </p:txBody>
+      </p:sp>
       <p:sp>
         <p:nvSpPr>
           <p:cNvPr id="2" name="Title 1"/>
@@ -6545,8 +6908,8 @@
         </p:nvSpPr>
         <p:spPr>
           <a:xfrm>
-            <a:off x="853418" y="2057400"/>
-            <a:ext cx="6095847" cy="1554480"/>
+            <a:off x="822960" y="2606040"/>
+            <a:ext cx="6705432" cy="1188720"/>
           </a:xfrm>
         </p:spPr>
         <p:txBody>
@@ -6561,9 +6924,9 @@
               </a:lnSpc>
             </a:pPr>
             <a:r>
-              <a:rPr sz="3600" b="1" i="0">
+              <a:rPr sz="4000" b="1" i="0">
                 <a:solidFill>
-                  <a:srgbClr val="113B5F"/>
+                  <a:srgbClr val="26231F"/>
                 </a:solidFill>
               </a:rPr>
               <a:t>감사합니다</a:t>
@@ -6573,14 +6936,14 @@
       </p:sp>
       <p:sp>
         <p:nvSpPr>
-          <p:cNvPr id="4" name="한 줄 문구"/>
+          <p:cNvPr id="6" name="한 줄 문구"/>
           <p:cNvSpPr txBox="1"/>
           <p:nvPr/>
         </p:nvSpPr>
         <p:spPr>
           <a:xfrm>
-            <a:off x="853418" y="3749039"/>
-            <a:ext cx="6095847" cy="822960"/>
+            <a:off x="822960" y="3886200"/>
+            <a:ext cx="6705432" cy="822960"/>
           </a:xfrm>
           <a:prstGeom prst="rect">
             <a:avLst/>
@@ -6599,9 +6962,9 @@
               </a:lnSpc>
             </a:pPr>
             <a:r>
-              <a:rPr sz="1700" b="0" i="1">
+              <a:rPr sz="1700" b="0" i="0">
                 <a:solidFill>
-                  <a:srgbClr val="113B5F"/>
+                  <a:srgbClr val="26231F"/>
                 </a:solidFill>
               </a:rPr>
               <a:t>끝까지 들어 주셔서 고맙습니다</a:t>
@@ -6611,14 +6974,14 @@
       </p:sp>
       <p:sp>
         <p:nvSpPr>
-          <p:cNvPr id="5" name="안내 문구"/>
+          <p:cNvPr id="7" name="안내 문구"/>
           <p:cNvSpPr txBox="1"/>
           <p:nvPr/>
         </p:nvSpPr>
         <p:spPr>
           <a:xfrm>
-            <a:off x="853418" y="4617720"/>
-            <a:ext cx="6095847" cy="914400"/>
+            <a:off x="822960" y="4754880"/>
+            <a:ext cx="6705432" cy="914400"/>
           </a:xfrm>
           <a:prstGeom prst="rect">
             <a:avLst/>
@@ -6639,7 +7002,7 @@
             <a:r>
               <a:rPr sz="1400" b="0" i="0">
                 <a:solidFill>
-                  <a:srgbClr val="666666"/>
+                  <a:srgbClr val="26231F"/>
                 </a:solidFill>
               </a:rPr>
               <a:t>문의 · 연락처를 입력하세요</a:t>
@@ -6666,34 +7029,34 @@
         <a:sysClr val="window" lastClr="FFFFFF"/>
       </a:lt1>
       <a:dk2>
-        <a:srgbClr val="113B5F"/>
+        <a:srgbClr val="273949"/>
       </a:dk2>
       <a:lt2>
-        <a:srgbClr val="EEF5FC"/>
+        <a:srgbClr val="EAF4FD"/>
       </a:lt2>
       <a:accent1>
-        <a:srgbClr val="267BC5"/>
+        <a:srgbClr val="7BB6EA"/>
       </a:accent1>
       <a:accent2>
-        <a:srgbClr val="209DB6"/>
+        <a:srgbClr val="9FA4EF"/>
       </a:accent2>
       <a:accent3>
-        <a:srgbClr val="113B5F"/>
+        <a:srgbClr val="273949"/>
       </a:accent3>
       <a:accent4>
         <a:srgbClr val="D1E7FA"/>
       </a:accent4>
       <a:accent5>
-        <a:srgbClr val="238CBE"/>
+        <a:srgbClr val="8DADEC"/>
       </a:accent5>
       <a:accent6>
-        <a:srgbClr val="70899F"/>
+        <a:srgbClr val="7D8892"/>
       </a:accent6>
       <a:hlink>
-        <a:srgbClr val="267BC5"/>
+        <a:srgbClr val="7BB6EA"/>
       </a:hlink>
       <a:folHlink>
-        <a:srgbClr val="113B5F"/>
+        <a:srgbClr val="273949"/>
       </a:folHlink>
     </a:clrScheme>
     <a:fontScheme name="Office">
